--- a/presentazioni/presentazione-v2.pptx
+++ b/presentazioni/presentazione-v2.pptx
@@ -4,6 +4,9 @@
   <p:sldMasterIdLst>
     <p:sldMasterId id="2147483648" r:id="rId1"/>
   </p:sldMasterIdLst>
+  <p:notesMasterIdLst>
+    <p:notesMasterId r:id="rId7"/>
+  </p:notesMasterIdLst>
   <p:sldIdLst>
     <p:sldId id="256" r:id="rId2"/>
     <p:sldId id="257" r:id="rId3"/>
@@ -11,10 +14,7 @@
     <p:sldId id="259" r:id="rId5"/>
     <p:sldId id="260" r:id="rId6"/>
   </p:sldIdLst>
-  <p:notesMasterIdLst>
-    <p:notesMasterId r:id="rId7"/>
-  </p:notesMasterIdLst>
-  <p:sldSz cx="9144000" cy="5143500"/>
+  <p:sldSz cx="9144000" cy="5143500" type="screen16x9"/>
   <p:notesSz cx="5143500" cy="9144000"/>
   <p:defaultTextStyle>
     <a:lvl1pPr marL="0" algn="l" defTabSz="914400" rtl="0" eaLnBrk="1" latinLnBrk="0" hangingPunct="1">
@@ -108,6 +108,11 @@
       </a:defRPr>
     </a:lvl9pPr>
   </p:defaultTextStyle>
+  <p:extLst>
+    <p:ext uri="{EFAFB233-063F-42B5-8137-9DF3F51BA10A}">
+      <p15:sldGuideLst xmlns:p15="http://schemas.microsoft.com/office/powerpoint/2012/main"/>
+    </p:ext>
+  </p:extLst>
 </p:presentation>
 </file>
 
@@ -133,234 +138,10 @@
           <a:chExt cx="0" cy="0"/>
         </a:xfrm>
       </p:grpSpPr>
-      <p:sp>
-        <p:nvSpPr>
-          <p:cNvPr id="2" name="Header Placeholder 1"/>
-          <p:cNvSpPr>
-            <a:spLocks noGrp="1"/>
-          </p:cNvSpPr>
-          <p:nvPr>
-            <p:ph type="hdr" sz="quarter"/>
-          </p:nvPr>
-        </p:nvSpPr>
-        <p:spPr>
-          <a:xfrm>
-            <a:off x="0" y="0"/>
-            <a:ext cx="2971800" cy="458788"/>
-          </a:xfrm>
-          <a:prstGeom prst="rect">
-            <a:avLst/>
-          </a:prstGeom>
-        </p:spPr>
-        <p:txBody>
-          <a:bodyPr vert="horz" lIns="91440" tIns="45720" rIns="91440" bIns="45720" rtlCol="0"/>
-          <a:lstStyle>
-            <a:lvl1pPr algn="l">
-              <a:defRPr sz="1200"/>
-            </a:lvl1pPr>
-          </a:lstStyle>
-          <a:p>
-            <a:endParaRPr lang="en-US"/>
-          </a:p>
-        </p:txBody>
-      </p:sp>
-      <p:sp>
-        <p:nvSpPr>
-          <p:cNvPr id="3" name="Date Placeholder 2"/>
-          <p:cNvSpPr>
-            <a:spLocks noGrp="1"/>
-          </p:cNvSpPr>
-          <p:nvPr>
-            <p:ph type="dt" idx="1"/>
-          </p:nvPr>
-        </p:nvSpPr>
-        <p:spPr>
-          <a:xfrm>
-            <a:off x="3884613" y="0"/>
-            <a:ext cx="2971800" cy="458788"/>
-          </a:xfrm>
-          <a:prstGeom prst="rect">
-            <a:avLst/>
-          </a:prstGeom>
-        </p:spPr>
-        <p:txBody>
-          <a:bodyPr vert="horz" lIns="91440" tIns="45720" rIns="91440" bIns="45720" rtlCol="0"/>
-          <a:lstStyle>
-            <a:lvl1pPr algn="r">
-              <a:defRPr sz="1200"/>
-            </a:lvl1pPr>
-          </a:lstStyle>
-          <a:p>
-            <a:fld id="{5282F153-3F37-0F45-9E97-73ACFA13230C}" type="datetimeFigureOut">
-              <a:rPr lang="en-US"/>
-              <a:t>7/23/19</a:t>
-            </a:fld>
-            <a:endParaRPr lang="en-US"/>
-          </a:p>
-        </p:txBody>
-      </p:sp>
-      <p:sp>
-        <p:nvSpPr>
-          <p:cNvPr id="4" name="Slide Image Placeholder 3"/>
-          <p:cNvSpPr>
-            <a:spLocks noGrp="1" noRot="1" noChangeAspect="1"/>
-          </p:cNvSpPr>
-          <p:nvPr>
-            <p:ph type="sldImg" idx="2"/>
-          </p:nvPr>
-        </p:nvSpPr>
-        <p:spPr>
-          <a:xfrm>
-            <a:off x="685800" y="1143000"/>
-            <a:ext cx="5486400" cy="3086100"/>
-          </a:xfrm>
-          <a:prstGeom prst="rect">
-            <a:avLst/>
-          </a:prstGeom>
-          <a:noFill/>
-          <a:ln w="12700">
-            <a:solidFill>
-              <a:prstClr val="black"/>
-            </a:solidFill>
-          </a:ln>
-        </p:spPr>
-        <p:txBody>
-          <a:bodyPr vert="horz" lIns="91440" tIns="45720" rIns="91440" bIns="45720" rtlCol="0" anchor="ctr"/>
-          <a:lstStyle/>
-          <a:p>
-            <a:endParaRPr lang="en-US"/>
-          </a:p>
-        </p:txBody>
-      </p:sp>
-      <p:sp>
-        <p:nvSpPr>
-          <p:cNvPr id="5" name="Notes Placeholder 4"/>
-          <p:cNvSpPr>
-            <a:spLocks noGrp="1"/>
-          </p:cNvSpPr>
-          <p:nvPr>
-            <p:ph type="body" sz="quarter" idx="3"/>
-          </p:nvPr>
-        </p:nvSpPr>
-        <p:spPr>
-          <a:xfrm>
-            <a:off x="685800" y="4400550"/>
-            <a:ext cx="5486400" cy="3600450"/>
-          </a:xfrm>
-          <a:prstGeom prst="rect">
-            <a:avLst/>
-          </a:prstGeom>
-        </p:spPr>
-        <p:txBody>
-          <a:bodyPr vert="horz" lIns="91440" tIns="45720" rIns="91440" bIns="45720" rtlCol="0"/>
-          <a:lstStyle/>
-          <a:p>
-            <a:pPr lvl="0"/>
-            <a:r>
-              <a:rPr lang="en-US"/>
-              <a:t>Click to edit Master text styles</a:t>
-            </a:r>
-          </a:p>
-          <a:p>
-            <a:pPr lvl="1"/>
-            <a:r>
-              <a:rPr lang="en-US"/>
-              <a:t>Second level</a:t>
-            </a:r>
-          </a:p>
-          <a:p>
-            <a:pPr lvl="2"/>
-            <a:r>
-              <a:rPr lang="en-US"/>
-              <a:t>Third level</a:t>
-            </a:r>
-          </a:p>
-          <a:p>
-            <a:pPr lvl="3"/>
-            <a:r>
-              <a:rPr lang="en-US"/>
-              <a:t>Fourth level</a:t>
-            </a:r>
-          </a:p>
-          <a:p>
-            <a:pPr lvl="4"/>
-            <a:r>
-              <a:rPr lang="en-US"/>
-              <a:t>Fifth level</a:t>
-            </a:r>
-          </a:p>
-        </p:txBody>
-      </p:sp>
-      <p:sp>
-        <p:nvSpPr>
-          <p:cNvPr id="6" name="Footer Placeholder 5"/>
-          <p:cNvSpPr>
-            <a:spLocks noGrp="1"/>
-          </p:cNvSpPr>
-          <p:nvPr>
-            <p:ph type="ftr" sz="quarter" idx="4"/>
-          </p:nvPr>
-        </p:nvSpPr>
-        <p:spPr>
-          <a:xfrm>
-            <a:off x="0" y="8685213"/>
-            <a:ext cx="2971800" cy="458787"/>
-          </a:xfrm>
-          <a:prstGeom prst="rect">
-            <a:avLst/>
-          </a:prstGeom>
-        </p:spPr>
-        <p:txBody>
-          <a:bodyPr vert="horz" lIns="91440" tIns="45720" rIns="91440" bIns="45720" rtlCol="0" anchor="b"/>
-          <a:lstStyle>
-            <a:lvl1pPr algn="l">
-              <a:defRPr sz="1200"/>
-            </a:lvl1pPr>
-          </a:lstStyle>
-          <a:p>
-            <a:endParaRPr lang="en-US"/>
-          </a:p>
-        </p:txBody>
-      </p:sp>
-      <p:sp>
-        <p:nvSpPr>
-          <p:cNvPr id="7" name="Slide Number Placeholder 6"/>
-          <p:cNvSpPr>
-            <a:spLocks noGrp="1"/>
-          </p:cNvSpPr>
-          <p:nvPr>
-            <p:ph type="sldNum" sz="quarter" idx="5"/>
-          </p:nvPr>
-        </p:nvSpPr>
-        <p:spPr>
-          <a:xfrm>
-            <a:off x="3884613" y="8685213"/>
-            <a:ext cx="2971800" cy="458787"/>
-          </a:xfrm>
-          <a:prstGeom prst="rect">
-            <a:avLst/>
-          </a:prstGeom>
-        </p:spPr>
-        <p:txBody>
-          <a:bodyPr vert="horz" lIns="91440" tIns="45720" rIns="91440" bIns="45720" rtlCol="0" anchor="b"/>
-          <a:lstStyle>
-            <a:lvl1pPr algn="r">
-              <a:defRPr sz="1200"/>
-            </a:lvl1pPr>
-          </a:lstStyle>
-          <a:p>
-            <a:fld id="{CE5E9CC1-C706-0F49-92D6-E571CC5EEA8F}" type="slidenum">
-              <a:rPr lang="en-US"/>
-              <a:t>‹#›</a:t>
-            </a:fld>
-            <a:endParaRPr lang="en-US"/>
-          </a:p>
-        </p:txBody>
-      </p:sp>
     </p:spTree>
     <p:extLst>
       <p:ext uri="{BB962C8B-B14F-4D97-AF65-F5344CB8AC3E}">
-        <p14:creationId xmlns:p14="http://schemas.microsoft.com/office/powerpoint/2010/main" val="1024086991"/>
+        <p14:creationId xmlns:p14="http://schemas.microsoft.com/office/powerpoint/2010/main" val="2308011564"/>
       </p:ext>
     </p:extLst>
   </p:cSld>
@@ -488,6 +269,13 @@
           </p:nvPr>
         </p:nvSpPr>
         <p:spPr/>
+        <p:txBody>
+          <a:bodyPr/>
+          <a:lstStyle/>
+          <a:p>
+            <a:endParaRPr lang="it-IT"/>
+          </a:p>
+        </p:txBody>
       </p:sp>
       <p:sp>
         <p:nvSpPr>
@@ -508,7 +296,6 @@
               <a:rPr lang="en-US" dirty="0"/>
               <a:t>Siamo il team di Trento Nascosta. Vi presentiamo una guida turistica per Trento, ma tutto tranne che convenzionale.</a:t>
             </a:r>
-            <a:endParaRPr lang="en-US" dirty="0"/>
           </a:p>
         </p:txBody>
       </p:sp>
@@ -576,6 +363,13 @@
           </p:nvPr>
         </p:nvSpPr>
         <p:spPr/>
+        <p:txBody>
+          <a:bodyPr/>
+          <a:lstStyle/>
+          <a:p>
+            <a:endParaRPr lang="it-IT"/>
+          </a:p>
+        </p:txBody>
       </p:sp>
       <p:sp>
         <p:nvSpPr>
@@ -596,7 +390,6 @@
               <a:rPr lang="en-US" dirty="0"/>
               <a:t>Trento accoglie circa 1,4 milioni di turisti l'anno, con una permanenza media di 2,7 giorni, e il numero è in crescita. Eppure si racconta quasi solo il Concilio e il passato austriaco. Resta fuori la storia più cittadina: la Tridentum romana, i bombardamenti della Seconda guerra mondiale e la ricostruzione, lo spostamento degli argini dell'Adige. Gli affreschi del centro sono tantissimi ma difficili da identificare e cercare online. Attori coinvolti: turisti, residenti e Comune. Se non interveniamo, questo patrimonio resta invisibile e i flussi si concentrano sui soliti due o tre luoghi.</a:t>
             </a:r>
-            <a:endParaRPr lang="en-US" dirty="0"/>
           </a:p>
         </p:txBody>
       </p:sp>
@@ -664,6 +457,13 @@
           </p:nvPr>
         </p:nvSpPr>
         <p:spPr/>
+        <p:txBody>
+          <a:bodyPr/>
+          <a:lstStyle/>
+          <a:p>
+            <a:endParaRPr lang="it-IT"/>
+          </a:p>
+        </p:txBody>
       </p:sp>
       <p:sp>
         <p:nvSpPr>
@@ -684,7 +484,6 @@
               <a:rPr lang="en-US" dirty="0"/>
               <a:t>La nostra risposta è Trento Nascosta: una web app che dà indicazioni ai turisti su cosa fare durante la permanenza, e colma il vuoto sulla storia meno raccontata. Sei funzioni: mappa dei punti di interesse, affreschi del centro geolocalizzati, caricamento di foto e aneddoti da parte degli utenti, cultura e tradizioni, mappa gastronomica e un minigame in stile GeoGuessr con foto storiche della città. L'elemento distintivo rispetto alle guide classiche è che i contenuti crescono grazie ai residenti, e il gioco aumenta il coinvolgimento. È realizzabile partendo da un nucleo di contenuti curati e può essere esteso in futuro ad altri quartieri o a tutto il Trentino.</a:t>
             </a:r>
-            <a:endParaRPr lang="en-US" dirty="0"/>
           </a:p>
         </p:txBody>
       </p:sp>
@@ -752,6 +551,13 @@
           </p:nvPr>
         </p:nvSpPr>
         <p:spPr/>
+        <p:txBody>
+          <a:bodyPr/>
+          <a:lstStyle/>
+          <a:p>
+            <a:endParaRPr lang="it-IT"/>
+          </a:p>
+        </p:txBody>
       </p:sp>
       <p:sp>
         <p:nvSpPr>
@@ -772,7 +578,6 @@
               <a:rPr lang="en-US" dirty="0"/>
               <a:t>Benefici diretti: i turisti hanno una guida sempre a portata di mano con itinerari originali; i residenti riscoprono la città e possono raccontarla; il Comune valorizza un patrimonio oggi poco visibile e distribuisce meglio i flussi. Nel lungo periodo si crea un archivio collettivo della memoria di Trento, si offre un motivo in più per allungare la permanenza e si rafforza il senso di appartenenza. Il valore aggiunto è una storia della città che non resta nei libri ma vive nelle strade.</a:t>
             </a:r>
-            <a:endParaRPr lang="en-US" dirty="0"/>
           </a:p>
         </p:txBody>
       </p:sp>
@@ -840,6 +645,13 @@
           </p:nvPr>
         </p:nvSpPr>
         <p:spPr/>
+        <p:txBody>
+          <a:bodyPr/>
+          <a:lstStyle/>
+          <a:p>
+            <a:endParaRPr lang="it-IT"/>
+          </a:p>
+        </p:txBody>
       </p:sp>
       <p:sp>
         <p:nvSpPr>
@@ -856,10 +668,6 @@
           <a:bodyPr/>
           <a:lstStyle/>
           <a:p>
-            <a:r>
-              <a:rPr lang="en-US" dirty="0"/>
-              <a:t/>
-            </a:r>
             <a:endParaRPr lang="en-US" dirty="0"/>
           </a:p>
         </p:txBody>
@@ -933,6 +741,11 @@
 <file path=ppt/slideMasters/slideMaster1.xml><?xml version="1.0" encoding="utf-8"?>
 <p:sldMaster xmlns:a="http://schemas.openxmlformats.org/drawingml/2006/main" xmlns:r="http://schemas.openxmlformats.org/officeDocument/2006/relationships" xmlns:p="http://schemas.openxmlformats.org/presentationml/2006/main">
   <p:cSld>
+    <p:bg>
+      <p:bgRef idx="1001">
+        <a:schemeClr val="bg1"/>
+      </p:bgRef>
+    </p:bg>
     <p:spTree>
       <p:nvGrpSpPr>
         <p:cNvPr id="1" name=""/>
@@ -1215,6 +1028,7 @@
         <a:solidFill>
           <a:srgbClr val="1B2428"/>
         </a:solidFill>
+        <a:effectLst/>
       </p:bgPr>
     </p:bg>
     <p:spTree>
@@ -1250,6 +1064,13 @@
           </a:solidFill>
           <a:ln/>
         </p:spPr>
+        <p:txBody>
+          <a:bodyPr/>
+          <a:lstStyle/>
+          <a:p>
+            <a:endParaRPr lang="it-IT"/>
+          </a:p>
+        </p:txBody>
       </p:sp>
       <p:sp>
         <p:nvSpPr>
@@ -1270,17 +1091,24 @@
           </a:solidFill>
           <a:ln/>
         </p:spPr>
+        <p:txBody>
+          <a:bodyPr/>
+          <a:lstStyle/>
+          <a:p>
+            <a:endParaRPr lang="it-IT"/>
+          </a:p>
+        </p:txBody>
       </p:sp>
       <p:pic>
         <p:nvPicPr>
-          <p:cNvPr id="4" name="Image 0" descr="preencoded.png">    </p:cNvPr>
+          <p:cNvPr id="4" name="Image 0" descr="preencoded.png"/>
           <p:cNvPicPr>
             <a:picLocks noChangeAspect="1"/>
           </p:cNvPicPr>
           <p:nvPr/>
         </p:nvPicPr>
         <p:blipFill>
-          <a:blip r:embed="rId1"/>
+          <a:blip r:embed="rId3"/>
           <a:stretch>
             <a:fillRect/>
           </a:stretch>
@@ -1316,11 +1144,11 @@
           <a:bodyPr wrap="square" lIns="0" tIns="0" rIns="0" bIns="0" rtlCol="0" anchor="t"/>
           <a:lstStyle/>
           <a:p>
-            <a:pPr indent="0" marL="0">
-              <a:buNone/>
-            </a:pPr>
-            <a:r>
-              <a:rPr lang="en-US" sz="975" b="1" spc="150" kern="0" dirty="0">
+            <a:pPr marL="0" indent="0">
+              <a:buNone/>
+            </a:pPr>
+            <a:r>
+              <a:rPr lang="en-US" sz="975" b="1" kern="0" spc="150" dirty="0">
                 <a:solidFill>
                   <a:srgbClr val="D99A2B"/>
                 </a:solidFill>
@@ -1355,7 +1183,7 @@
           <a:bodyPr wrap="square" lIns="0" tIns="0" rIns="0" bIns="0" rtlCol="0" anchor="t"/>
           <a:lstStyle/>
           <a:p>
-            <a:pPr indent="0" marL="0">
+            <a:pPr marL="0" indent="0">
               <a:buNone/>
             </a:pPr>
             <a:r>
@@ -1394,7 +1222,7 @@
           <a:bodyPr wrap="square" lIns="0" tIns="0" rIns="0" bIns="0" rtlCol="0" anchor="t"/>
           <a:lstStyle/>
           <a:p>
-            <a:pPr indent="0" marL="0">
+            <a:pPr marL="0" indent="0">
               <a:buNone/>
             </a:pPr>
             <a:r>
@@ -1433,7 +1261,7 @@
           <a:bodyPr wrap="square" lIns="0" tIns="0" rIns="0" bIns="0" rtlCol="0" anchor="t"/>
           <a:lstStyle/>
           <a:p>
-            <a:pPr indent="0" marL="0">
+            <a:pPr marL="0" indent="0">
               <a:buNone/>
             </a:pPr>
             <a:r>
@@ -1472,7 +1300,7 @@
           <a:bodyPr wrap="square" lIns="0" tIns="0" rIns="0" bIns="0" rtlCol="0" anchor="t"/>
           <a:lstStyle/>
           <a:p>
-            <a:pPr indent="0" marL="0">
+            <a:pPr marL="0" indent="0">
               <a:buNone/>
             </a:pPr>
             <a:r>
@@ -1511,7 +1339,7 @@
           <a:bodyPr wrap="square" lIns="0" tIns="0" rIns="0" bIns="0" rtlCol="0" anchor="t"/>
           <a:lstStyle/>
           <a:p>
-            <a:pPr indent="0" marL="0">
+            <a:pPr marL="0" indent="0">
               <a:buNone/>
             </a:pPr>
             <a:r>
@@ -1545,6 +1373,7 @@
         <a:solidFill>
           <a:srgbClr val="F4EEE4"/>
         </a:solidFill>
+        <a:effectLst/>
       </p:bgPr>
     </p:bg>
     <p:spTree>
@@ -1580,6 +1409,13 @@
           </a:solidFill>
           <a:ln/>
         </p:spPr>
+        <p:txBody>
+          <a:bodyPr/>
+          <a:lstStyle/>
+          <a:p>
+            <a:endParaRPr lang="it-IT"/>
+          </a:p>
+        </p:txBody>
       </p:sp>
       <p:sp>
         <p:nvSpPr>
@@ -1602,11 +1438,11 @@
           <a:bodyPr wrap="square" lIns="0" tIns="0" rIns="0" bIns="0" rtlCol="0" anchor="t"/>
           <a:lstStyle/>
           <a:p>
-            <a:pPr indent="0" marL="0">
-              <a:buNone/>
-            </a:pPr>
-            <a:r>
-              <a:rPr lang="en-US" sz="900" b="1" spc="150" kern="0" dirty="0">
+            <a:pPr marL="0" indent="0">
+              <a:buNone/>
+            </a:pPr>
+            <a:r>
+              <a:rPr lang="en-US" sz="900" b="1" kern="0" spc="150" dirty="0">
                 <a:solidFill>
                   <a:srgbClr val="F6D9CC"/>
                 </a:solidFill>
@@ -1641,7 +1477,7 @@
           <a:bodyPr wrap="square" lIns="0" tIns="0" rIns="0" bIns="0" rtlCol="0" anchor="t"/>
           <a:lstStyle/>
           <a:p>
-            <a:pPr indent="0" marL="0">
+            <a:pPr marL="0" indent="0">
               <a:buNone/>
             </a:pPr>
             <a:r>
@@ -1680,7 +1516,7 @@
           <a:bodyPr wrap="square" lIns="0" tIns="0" rIns="0" bIns="0" rtlCol="0" anchor="t"/>
           <a:lstStyle/>
           <a:p>
-            <a:pPr indent="0" marL="0">
+            <a:pPr marL="0" indent="0">
               <a:buNone/>
             </a:pPr>
             <a:r>
@@ -1719,7 +1555,7 @@
           <a:bodyPr wrap="square" lIns="0" tIns="0" rIns="0" bIns="0" rtlCol="0" anchor="t"/>
           <a:lstStyle/>
           <a:p>
-            <a:pPr indent="0" marL="0">
+            <a:pPr marL="0" indent="0">
               <a:buNone/>
             </a:pPr>
             <a:r>
@@ -1758,7 +1594,7 @@
           <a:bodyPr wrap="square" lIns="0" tIns="0" rIns="0" bIns="0" rtlCol="0" anchor="t"/>
           <a:lstStyle/>
           <a:p>
-            <a:pPr indent="0" marL="0">
+            <a:pPr marL="0" indent="0">
               <a:buNone/>
             </a:pPr>
             <a:r>
@@ -1797,7 +1633,7 @@
           <a:bodyPr wrap="square" lIns="0" tIns="0" rIns="0" bIns="0" rtlCol="0" anchor="t"/>
           <a:lstStyle/>
           <a:p>
-            <a:pPr indent="0" marL="0">
+            <a:pPr marL="0" indent="0">
               <a:buNone/>
             </a:pPr>
             <a:r>
@@ -1836,7 +1672,7 @@
           <a:bodyPr wrap="square" lIns="0" tIns="0" rIns="0" bIns="0" rtlCol="0" anchor="t"/>
           <a:lstStyle/>
           <a:p>
-            <a:pPr indent="0" marL="0">
+            <a:pPr marL="0" indent="0">
               <a:buNone/>
             </a:pPr>
             <a:r>
@@ -1875,7 +1711,7 @@
           <a:bodyPr wrap="square" lIns="0" tIns="0" rIns="0" bIns="0" rtlCol="0" anchor="t"/>
           <a:lstStyle/>
           <a:p>
-            <a:pPr indent="0" marL="0">
+            <a:pPr marL="0" indent="0">
               <a:buNone/>
             </a:pPr>
             <a:r>
@@ -1914,7 +1750,7 @@
           <a:bodyPr wrap="square" lIns="0" tIns="0" rIns="0" bIns="0" rtlCol="0" anchor="t"/>
           <a:lstStyle/>
           <a:p>
-            <a:pPr indent="0" marL="0">
+            <a:pPr marL="0" indent="0">
               <a:buNone/>
             </a:pPr>
             <a:r>
@@ -1951,254 +1787,17 @@
           </a:solidFill>
           <a:ln/>
         </p:spPr>
+        <p:txBody>
+          <a:bodyPr/>
+          <a:lstStyle/>
+          <a:p>
+            <a:endParaRPr lang="it-IT"/>
+          </a:p>
+        </p:txBody>
       </p:sp>
       <p:pic>
         <p:nvPicPr>
-          <p:cNvPr id="13" name="Image 0" descr="preencoded.png">    </p:cNvPr>
-          <p:cNvPicPr>
-            <a:picLocks noChangeAspect="1"/>
-          </p:cNvPicPr>
-          <p:nvPr/>
-        </p:nvPicPr>
-        <p:blipFill>
-          <a:blip r:embed="rId1"/>
-          <a:stretch>
-            <a:fillRect/>
-          </a:stretch>
-        </p:blipFill>
-        <p:spPr>
-          <a:xfrm>
-            <a:off x="3871913" y="2195513"/>
-            <a:ext cx="200025" cy="200025"/>
-          </a:xfrm>
-          <a:prstGeom prst="rect">
-            <a:avLst/>
-          </a:prstGeom>
-        </p:spPr>
-      </p:pic>
-      <p:sp>
-        <p:nvSpPr>
-          <p:cNvPr id="14" name="Text 11"/>
-          <p:cNvSpPr txBox="1"/>
-          <p:nvPr/>
-        </p:nvSpPr>
-        <p:spPr>
-          <a:xfrm>
-            <a:off x="4333875" y="2076450"/>
-            <a:ext cx="4191000" cy="228600"/>
-          </a:xfrm>
-          <a:prstGeom prst="rect">
-            <a:avLst/>
-          </a:prstGeom>
-          <a:noFill/>
-          <a:ln/>
-        </p:spPr>
-        <p:txBody>
-          <a:bodyPr wrap="square" lIns="0" tIns="0" rIns="0" bIns="0" rtlCol="0" anchor="t"/>
-          <a:lstStyle/>
-          <a:p>
-            <a:pPr indent="0" marL="0">
-              <a:buNone/>
-            </a:pPr>
-            <a:r>
-              <a:rPr lang="en-US" sz="1350" b="1" dirty="0">
-                <a:solidFill>
-                  <a:srgbClr val="1B2428"/>
-                </a:solidFill>
-                <a:latin typeface="Calibri" pitchFamily="34" charset="0"/>
-                <a:ea typeface="Calibri" pitchFamily="34" charset="-122"/>
-                <a:cs typeface="Calibri" pitchFamily="34" charset="-120"/>
-              </a:rPr>
-              <a:t>Turismo di superficie</a:t>
-            </a:r>
-            <a:endParaRPr lang="en-US" sz="1350" dirty="0"/>
-          </a:p>
-        </p:txBody>
-      </p:sp>
-      <p:sp>
-        <p:nvSpPr>
-          <p:cNvPr id="15" name="Text 12"/>
-          <p:cNvSpPr txBox="1"/>
-          <p:nvPr/>
-        </p:nvSpPr>
-        <p:spPr>
-          <a:xfrm>
-            <a:off x="4333875" y="2314575"/>
-            <a:ext cx="4191000" cy="200025"/>
-          </a:xfrm>
-          <a:prstGeom prst="rect">
-            <a:avLst/>
-          </a:prstGeom>
-          <a:noFill/>
-          <a:ln/>
-        </p:spPr>
-        <p:txBody>
-          <a:bodyPr wrap="square" lIns="0" tIns="0" rIns="0" bIns="0" rtlCol="0" anchor="t"/>
-          <a:lstStyle/>
-          <a:p>
-            <a:pPr indent="0" marL="0">
-              <a:buNone/>
-            </a:pPr>
-            <a:r>
-              <a:rPr lang="en-US" sz="1050" dirty="0">
-                <a:solidFill>
-                  <a:srgbClr val="5A5F5E"/>
-                </a:solidFill>
-                <a:latin typeface="Calibri" pitchFamily="34" charset="0"/>
-                <a:ea typeface="Calibri" pitchFamily="34" charset="-122"/>
-                <a:cs typeface="Calibri" pitchFamily="34" charset="-120"/>
-              </a:rPr>
-              <a:t>Sempre i soliti due o tre luoghi</a:t>
-            </a:r>
-            <a:endParaRPr lang="en-US" sz="1050" dirty="0"/>
-          </a:p>
-        </p:txBody>
-      </p:sp>
-      <p:sp>
-        <p:nvSpPr>
-          <p:cNvPr id="16" name="Shape 13"/>
-          <p:cNvSpPr/>
-          <p:nvPr/>
-        </p:nvSpPr>
-        <p:spPr>
-          <a:xfrm>
-            <a:off x="3771900" y="2809875"/>
-            <a:ext cx="400050" cy="400050"/>
-          </a:xfrm>
-          <a:prstGeom prst="ellipse">
-            <a:avLst/>
-          </a:prstGeom>
-          <a:solidFill>
-            <a:srgbClr val="1B2428"/>
-          </a:solidFill>
-          <a:ln/>
-        </p:spPr>
-      </p:sp>
-      <p:pic>
-        <p:nvPicPr>
-          <p:cNvPr id="17" name="Image 1" descr="preencoded.png">    </p:cNvPr>
-          <p:cNvPicPr>
-            <a:picLocks noChangeAspect="1"/>
-          </p:cNvPicPr>
-          <p:nvPr/>
-        </p:nvPicPr>
-        <p:blipFill>
-          <a:blip r:embed="rId2"/>
-          <a:stretch>
-            <a:fillRect/>
-          </a:stretch>
-        </p:blipFill>
-        <p:spPr>
-          <a:xfrm>
-            <a:off x="3871913" y="2909888"/>
-            <a:ext cx="200025" cy="200025"/>
-          </a:xfrm>
-          <a:prstGeom prst="rect">
-            <a:avLst/>
-          </a:prstGeom>
-        </p:spPr>
-      </p:pic>
-      <p:sp>
-        <p:nvSpPr>
-          <p:cNvPr id="18" name="Text 14"/>
-          <p:cNvSpPr txBox="1"/>
-          <p:nvPr/>
-        </p:nvSpPr>
-        <p:spPr>
-          <a:xfrm>
-            <a:off x="4333875" y="2790825"/>
-            <a:ext cx="4191000" cy="228600"/>
-          </a:xfrm>
-          <a:prstGeom prst="rect">
-            <a:avLst/>
-          </a:prstGeom>
-          <a:noFill/>
-          <a:ln/>
-        </p:spPr>
-        <p:txBody>
-          <a:bodyPr wrap="square" lIns="0" tIns="0" rIns="0" bIns="0" rtlCol="0" anchor="t"/>
-          <a:lstStyle/>
-          <a:p>
-            <a:pPr indent="0" marL="0">
-              <a:buNone/>
-            </a:pPr>
-            <a:r>
-              <a:rPr lang="en-US" sz="1350" b="1" dirty="0">
-                <a:solidFill>
-                  <a:srgbClr val="1B2428"/>
-                </a:solidFill>
-                <a:latin typeface="Calibri" pitchFamily="34" charset="0"/>
-                <a:ea typeface="Calibri" pitchFamily="34" charset="-122"/>
-                <a:cs typeface="Calibri" pitchFamily="34" charset="-120"/>
-              </a:rPr>
-              <a:t>Informazioni introvabili</a:t>
-            </a:r>
-            <a:endParaRPr lang="en-US" sz="1350" dirty="0"/>
-          </a:p>
-        </p:txBody>
-      </p:sp>
-      <p:sp>
-        <p:nvSpPr>
-          <p:cNvPr id="19" name="Text 15"/>
-          <p:cNvSpPr txBox="1"/>
-          <p:nvPr/>
-        </p:nvSpPr>
-        <p:spPr>
-          <a:xfrm>
-            <a:off x="4333875" y="3028950"/>
-            <a:ext cx="4191000" cy="200025"/>
-          </a:xfrm>
-          <a:prstGeom prst="rect">
-            <a:avLst/>
-          </a:prstGeom>
-          <a:noFill/>
-          <a:ln/>
-        </p:spPr>
-        <p:txBody>
-          <a:bodyPr wrap="square" lIns="0" tIns="0" rIns="0" bIns="0" rtlCol="0" anchor="t"/>
-          <a:lstStyle/>
-          <a:p>
-            <a:pPr indent="0" marL="0">
-              <a:buNone/>
-            </a:pPr>
-            <a:r>
-              <a:rPr lang="en-US" sz="1050" dirty="0">
-                <a:solidFill>
-                  <a:srgbClr val="5A5F5E"/>
-                </a:solidFill>
-                <a:latin typeface="Calibri" pitchFamily="34" charset="0"/>
-                <a:ea typeface="Calibri" pitchFamily="34" charset="-122"/>
-                <a:cs typeface="Calibri" pitchFamily="34" charset="-120"/>
-              </a:rPr>
-              <a:t>Scarse, sparse o a pagamento</a:t>
-            </a:r>
-            <a:endParaRPr lang="en-US" sz="1050" dirty="0"/>
-          </a:p>
-        </p:txBody>
-      </p:sp>
-      <p:sp>
-        <p:nvSpPr>
-          <p:cNvPr id="20" name="Shape 16"/>
-          <p:cNvSpPr/>
-          <p:nvPr/>
-        </p:nvSpPr>
-        <p:spPr>
-          <a:xfrm>
-            <a:off x="3771900" y="3524250"/>
-            <a:ext cx="400050" cy="400050"/>
-          </a:xfrm>
-          <a:prstGeom prst="ellipse">
-            <a:avLst/>
-          </a:prstGeom>
-          <a:solidFill>
-            <a:srgbClr val="1B2428"/>
-          </a:solidFill>
-          <a:ln/>
-        </p:spPr>
-      </p:sp>
-      <p:pic>
-        <p:nvPicPr>
-          <p:cNvPr id="21" name="Image 2" descr="preencoded.png">    </p:cNvPr>
+          <p:cNvPr id="13" name="Image 0" descr="preencoded.png"/>
           <p:cNvPicPr>
             <a:picLocks noChangeAspect="1"/>
           </p:cNvPicPr>
@@ -2212,7 +1811,7 @@
         </p:blipFill>
         <p:spPr>
           <a:xfrm>
-            <a:off x="3871913" y="3624263"/>
+            <a:off x="3871913" y="2195513"/>
             <a:ext cx="200025" cy="200025"/>
           </a:xfrm>
           <a:prstGeom prst="rect">
@@ -2222,13 +1821,13 @@
       </p:pic>
       <p:sp>
         <p:nvSpPr>
-          <p:cNvPr id="22" name="Text 17"/>
-          <p:cNvSpPr txBox="1"/>
-          <p:nvPr/>
-        </p:nvSpPr>
-        <p:spPr>
-          <a:xfrm>
-            <a:off x="4333875" y="3505200"/>
+          <p:cNvPr id="14" name="Text 11"/>
+          <p:cNvSpPr txBox="1"/>
+          <p:nvPr/>
+        </p:nvSpPr>
+        <p:spPr>
+          <a:xfrm>
+            <a:off x="4333875" y="2076450"/>
             <a:ext cx="4191000" cy="228600"/>
           </a:xfrm>
           <a:prstGeom prst="rect">
@@ -2241,7 +1840,7 @@
           <a:bodyPr wrap="square" lIns="0" tIns="0" rIns="0" bIns="0" rtlCol="0" anchor="t"/>
           <a:lstStyle/>
           <a:p>
-            <a:pPr indent="0" marL="0">
+            <a:pPr marL="0" indent="0">
               <a:buNone/>
             </a:pPr>
             <a:r>
@@ -2253,6 +1852,264 @@
                 <a:ea typeface="Calibri" pitchFamily="34" charset="-122"/>
                 <a:cs typeface="Calibri" pitchFamily="34" charset="-120"/>
               </a:rPr>
+              <a:t>Turismo di superficie</a:t>
+            </a:r>
+            <a:endParaRPr lang="en-US" sz="1350" dirty="0"/>
+          </a:p>
+        </p:txBody>
+      </p:sp>
+      <p:sp>
+        <p:nvSpPr>
+          <p:cNvPr id="15" name="Text 12"/>
+          <p:cNvSpPr txBox="1"/>
+          <p:nvPr/>
+        </p:nvSpPr>
+        <p:spPr>
+          <a:xfrm>
+            <a:off x="4333875" y="2314575"/>
+            <a:ext cx="4191000" cy="200025"/>
+          </a:xfrm>
+          <a:prstGeom prst="rect">
+            <a:avLst/>
+          </a:prstGeom>
+          <a:noFill/>
+          <a:ln/>
+        </p:spPr>
+        <p:txBody>
+          <a:bodyPr wrap="square" lIns="0" tIns="0" rIns="0" bIns="0" rtlCol="0" anchor="t"/>
+          <a:lstStyle/>
+          <a:p>
+            <a:pPr marL="0" indent="0">
+              <a:buNone/>
+            </a:pPr>
+            <a:r>
+              <a:rPr lang="en-US" sz="1050" dirty="0">
+                <a:solidFill>
+                  <a:srgbClr val="5A5F5E"/>
+                </a:solidFill>
+                <a:latin typeface="Calibri" pitchFamily="34" charset="0"/>
+                <a:ea typeface="Calibri" pitchFamily="34" charset="-122"/>
+                <a:cs typeface="Calibri" pitchFamily="34" charset="-120"/>
+              </a:rPr>
+              <a:t>Sempre i soliti due o tre luoghi</a:t>
+            </a:r>
+            <a:endParaRPr lang="en-US" sz="1050" dirty="0"/>
+          </a:p>
+        </p:txBody>
+      </p:sp>
+      <p:sp>
+        <p:nvSpPr>
+          <p:cNvPr id="16" name="Shape 13"/>
+          <p:cNvSpPr/>
+          <p:nvPr/>
+        </p:nvSpPr>
+        <p:spPr>
+          <a:xfrm>
+            <a:off x="3771900" y="2809875"/>
+            <a:ext cx="400050" cy="400050"/>
+          </a:xfrm>
+          <a:prstGeom prst="ellipse">
+            <a:avLst/>
+          </a:prstGeom>
+          <a:solidFill>
+            <a:srgbClr val="1B2428"/>
+          </a:solidFill>
+          <a:ln/>
+        </p:spPr>
+        <p:txBody>
+          <a:bodyPr/>
+          <a:lstStyle/>
+          <a:p>
+            <a:endParaRPr lang="it-IT"/>
+          </a:p>
+        </p:txBody>
+      </p:sp>
+      <p:pic>
+        <p:nvPicPr>
+          <p:cNvPr id="17" name="Image 1" descr="preencoded.png"/>
+          <p:cNvPicPr>
+            <a:picLocks noChangeAspect="1"/>
+          </p:cNvPicPr>
+          <p:nvPr/>
+        </p:nvPicPr>
+        <p:blipFill>
+          <a:blip r:embed="rId4"/>
+          <a:stretch>
+            <a:fillRect/>
+          </a:stretch>
+        </p:blipFill>
+        <p:spPr>
+          <a:xfrm>
+            <a:off x="3871913" y="2909888"/>
+            <a:ext cx="200025" cy="200025"/>
+          </a:xfrm>
+          <a:prstGeom prst="rect">
+            <a:avLst/>
+          </a:prstGeom>
+        </p:spPr>
+      </p:pic>
+      <p:sp>
+        <p:nvSpPr>
+          <p:cNvPr id="18" name="Text 14"/>
+          <p:cNvSpPr txBox="1"/>
+          <p:nvPr/>
+        </p:nvSpPr>
+        <p:spPr>
+          <a:xfrm>
+            <a:off x="4333875" y="2790825"/>
+            <a:ext cx="4191000" cy="228600"/>
+          </a:xfrm>
+          <a:prstGeom prst="rect">
+            <a:avLst/>
+          </a:prstGeom>
+          <a:noFill/>
+          <a:ln/>
+        </p:spPr>
+        <p:txBody>
+          <a:bodyPr wrap="square" lIns="0" tIns="0" rIns="0" bIns="0" rtlCol="0" anchor="t"/>
+          <a:lstStyle/>
+          <a:p>
+            <a:pPr marL="0" indent="0">
+              <a:buNone/>
+            </a:pPr>
+            <a:r>
+              <a:rPr lang="en-US" sz="1350" b="1" dirty="0">
+                <a:solidFill>
+                  <a:srgbClr val="1B2428"/>
+                </a:solidFill>
+                <a:latin typeface="Calibri" pitchFamily="34" charset="0"/>
+                <a:ea typeface="Calibri" pitchFamily="34" charset="-122"/>
+                <a:cs typeface="Calibri" pitchFamily="34" charset="-120"/>
+              </a:rPr>
+              <a:t>Informazioni secondarie introvabili</a:t>
+            </a:r>
+            <a:endParaRPr lang="en-US" sz="1350" dirty="0"/>
+          </a:p>
+        </p:txBody>
+      </p:sp>
+      <p:sp>
+        <p:nvSpPr>
+          <p:cNvPr id="19" name="Text 15"/>
+          <p:cNvSpPr txBox="1"/>
+          <p:nvPr/>
+        </p:nvSpPr>
+        <p:spPr>
+          <a:xfrm>
+            <a:off x="4333875" y="3028950"/>
+            <a:ext cx="4191000" cy="200025"/>
+          </a:xfrm>
+          <a:prstGeom prst="rect">
+            <a:avLst/>
+          </a:prstGeom>
+          <a:noFill/>
+          <a:ln/>
+        </p:spPr>
+        <p:txBody>
+          <a:bodyPr wrap="square" lIns="0" tIns="0" rIns="0" bIns="0" rtlCol="0" anchor="t"/>
+          <a:lstStyle/>
+          <a:p>
+            <a:pPr marL="0" indent="0">
+              <a:buNone/>
+            </a:pPr>
+            <a:r>
+              <a:rPr lang="en-US" sz="1050" dirty="0">
+                <a:solidFill>
+                  <a:srgbClr val="5A5F5E"/>
+                </a:solidFill>
+                <a:latin typeface="Calibri" pitchFamily="34" charset="0"/>
+                <a:ea typeface="Calibri" pitchFamily="34" charset="-122"/>
+                <a:cs typeface="Calibri" pitchFamily="34" charset="-120"/>
+              </a:rPr>
+              <a:t>Scarse, sparse o a pagamento</a:t>
+            </a:r>
+            <a:endParaRPr lang="en-US" sz="1050" dirty="0"/>
+          </a:p>
+        </p:txBody>
+      </p:sp>
+      <p:sp>
+        <p:nvSpPr>
+          <p:cNvPr id="20" name="Shape 16"/>
+          <p:cNvSpPr/>
+          <p:nvPr/>
+        </p:nvSpPr>
+        <p:spPr>
+          <a:xfrm>
+            <a:off x="3771900" y="3524250"/>
+            <a:ext cx="400050" cy="400050"/>
+          </a:xfrm>
+          <a:prstGeom prst="ellipse">
+            <a:avLst/>
+          </a:prstGeom>
+          <a:solidFill>
+            <a:srgbClr val="1B2428"/>
+          </a:solidFill>
+          <a:ln/>
+        </p:spPr>
+        <p:txBody>
+          <a:bodyPr/>
+          <a:lstStyle/>
+          <a:p>
+            <a:endParaRPr lang="it-IT"/>
+          </a:p>
+        </p:txBody>
+      </p:sp>
+      <p:pic>
+        <p:nvPicPr>
+          <p:cNvPr id="21" name="Image 2" descr="preencoded.png"/>
+          <p:cNvPicPr>
+            <a:picLocks noChangeAspect="1"/>
+          </p:cNvPicPr>
+          <p:nvPr/>
+        </p:nvPicPr>
+        <p:blipFill>
+          <a:blip r:embed="rId5"/>
+          <a:stretch>
+            <a:fillRect/>
+          </a:stretch>
+        </p:blipFill>
+        <p:spPr>
+          <a:xfrm>
+            <a:off x="3871913" y="3624263"/>
+            <a:ext cx="200025" cy="200025"/>
+          </a:xfrm>
+          <a:prstGeom prst="rect">
+            <a:avLst/>
+          </a:prstGeom>
+        </p:spPr>
+      </p:pic>
+      <p:sp>
+        <p:nvSpPr>
+          <p:cNvPr id="22" name="Text 17"/>
+          <p:cNvSpPr txBox="1"/>
+          <p:nvPr/>
+        </p:nvSpPr>
+        <p:spPr>
+          <a:xfrm>
+            <a:off x="4333875" y="3505200"/>
+            <a:ext cx="4191000" cy="228600"/>
+          </a:xfrm>
+          <a:prstGeom prst="rect">
+            <a:avLst/>
+          </a:prstGeom>
+          <a:noFill/>
+          <a:ln/>
+        </p:spPr>
+        <p:txBody>
+          <a:bodyPr wrap="square" lIns="0" tIns="0" rIns="0" bIns="0" rtlCol="0" anchor="t"/>
+          <a:lstStyle/>
+          <a:p>
+            <a:pPr marL="0" indent="0">
+              <a:buNone/>
+            </a:pPr>
+            <a:r>
+              <a:rPr lang="en-US" sz="1350" b="1" dirty="0">
+                <a:solidFill>
+                  <a:srgbClr val="1B2428"/>
+                </a:solidFill>
+                <a:latin typeface="Calibri" pitchFamily="34" charset="0"/>
+                <a:ea typeface="Calibri" pitchFamily="34" charset="-122"/>
+                <a:cs typeface="Calibri" pitchFamily="34" charset="-120"/>
+              </a:rPr>
               <a:t>Memoria popolare dimenticata</a:t>
             </a:r>
             <a:endParaRPr lang="en-US" sz="1350" dirty="0"/>
@@ -2280,7 +2137,7 @@
           <a:bodyPr wrap="square" lIns="0" tIns="0" rIns="0" bIns="0" rtlCol="0" anchor="t"/>
           <a:lstStyle/>
           <a:p>
-            <a:pPr indent="0" marL="0">
+            <a:pPr marL="0" indent="0">
               <a:buNone/>
             </a:pPr>
             <a:r>
@@ -2314,6 +2171,7 @@
         <a:solidFill>
           <a:srgbClr val="F4EEE4"/>
         </a:solidFill>
+        <a:effectLst/>
       </p:bgPr>
     </p:bg>
     <p:spTree>
@@ -2351,7 +2209,7 @@
           <a:bodyPr wrap="square" lIns="0" tIns="0" rIns="0" bIns="0" rtlCol="0" anchor="t"/>
           <a:lstStyle/>
           <a:p>
-            <a:pPr indent="0" marL="0">
+            <a:pPr marL="0" indent="0">
               <a:buNone/>
             </a:pPr>
             <a:r>
@@ -2390,7 +2248,7 @@
           <a:bodyPr wrap="square" lIns="0" tIns="0" rIns="0" bIns="0" rtlCol="0" anchor="t"/>
           <a:lstStyle/>
           <a:p>
-            <a:pPr indent="0" marL="0">
+            <a:pPr marL="0" indent="0">
               <a:buNone/>
             </a:pPr>
             <a:r>
@@ -2434,6 +2292,13 @@
             <a:prstDash val="solid"/>
           </a:ln>
         </p:spPr>
+        <p:txBody>
+          <a:bodyPr/>
+          <a:lstStyle/>
+          <a:p>
+            <a:endParaRPr lang="it-IT"/>
+          </a:p>
+        </p:txBody>
       </p:sp>
       <p:sp>
         <p:nvSpPr>
@@ -2454,308 +2319,17 @@
           </a:solidFill>
           <a:ln/>
         </p:spPr>
+        <p:txBody>
+          <a:bodyPr/>
+          <a:lstStyle/>
+          <a:p>
+            <a:endParaRPr lang="it-IT"/>
+          </a:p>
+        </p:txBody>
       </p:sp>
       <p:pic>
         <p:nvPicPr>
-          <p:cNvPr id="6" name="Image 0" descr="preencoded.png">    </p:cNvPr>
-          <p:cNvPicPr>
-            <a:picLocks noChangeAspect="1"/>
-          </p:cNvPicPr>
-          <p:nvPr/>
-        </p:nvPicPr>
-        <p:blipFill>
-          <a:blip r:embed="rId1"/>
-          <a:stretch>
-            <a:fillRect/>
-          </a:stretch>
-        </p:blipFill>
-        <p:spPr>
-          <a:xfrm>
-            <a:off x="862013" y="1871663"/>
-            <a:ext cx="161925" cy="161925"/>
-          </a:xfrm>
-          <a:prstGeom prst="rect">
-            <a:avLst/>
-          </a:prstGeom>
-        </p:spPr>
-      </p:pic>
-      <p:sp>
-        <p:nvSpPr>
-          <p:cNvPr id="7" name="Text 4"/>
-          <p:cNvSpPr txBox="1"/>
-          <p:nvPr/>
-        </p:nvSpPr>
-        <p:spPr>
-          <a:xfrm>
-            <a:off x="1200150" y="1790700"/>
-            <a:ext cx="1824038" cy="323850"/>
-          </a:xfrm>
-          <a:prstGeom prst="rect">
-            <a:avLst/>
-          </a:prstGeom>
-          <a:noFill/>
-          <a:ln/>
-        </p:spPr>
-        <p:txBody>
-          <a:bodyPr wrap="square" lIns="0" tIns="0" rIns="0" bIns="0" rtlCol="0" anchor="ctr"/>
-          <a:lstStyle/>
-          <a:p>
-            <a:pPr indent="0" marL="0">
-              <a:buNone/>
-            </a:pPr>
-            <a:r>
-              <a:rPr lang="en-US" sz="1275" b="1" dirty="0">
-                <a:solidFill>
-                  <a:srgbClr val="1B2428"/>
-                </a:solidFill>
-                <a:latin typeface="Calibri" pitchFamily="34" charset="0"/>
-                <a:ea typeface="Calibri" pitchFamily="34" charset="-122"/>
-                <a:cs typeface="Calibri" pitchFamily="34" charset="-120"/>
-              </a:rPr>
-              <a:t>Mappa dei luoghi</a:t>
-            </a:r>
-            <a:endParaRPr lang="en-US" sz="1275" dirty="0"/>
-          </a:p>
-        </p:txBody>
-      </p:sp>
-      <p:sp>
-        <p:nvSpPr>
-          <p:cNvPr id="8" name="Text 5"/>
-          <p:cNvSpPr txBox="1"/>
-          <p:nvPr/>
-        </p:nvSpPr>
-        <p:spPr>
-          <a:xfrm>
-            <a:off x="781050" y="2238375"/>
-            <a:ext cx="2195513" cy="428625"/>
-          </a:xfrm>
-          <a:prstGeom prst="rect">
-            <a:avLst/>
-          </a:prstGeom>
-          <a:noFill/>
-          <a:ln/>
-        </p:spPr>
-        <p:txBody>
-          <a:bodyPr wrap="square" lIns="0" tIns="0" rIns="0" bIns="0" rtlCol="0" anchor="t"/>
-          <a:lstStyle/>
-          <a:p>
-            <a:pPr indent="0" marL="0">
-              <a:buNone/>
-            </a:pPr>
-            <a:r>
-              <a:rPr lang="en-US" sz="1050" dirty="0">
-                <a:solidFill>
-                  <a:srgbClr val="5A5F5E"/>
-                </a:solidFill>
-                <a:latin typeface="Calibri" pitchFamily="34" charset="0"/>
-                <a:ea typeface="Calibri" pitchFamily="34" charset="-122"/>
-                <a:cs typeface="Calibri" pitchFamily="34" charset="-120"/>
-              </a:rPr>
-              <a:t>Cosa vedere e fare, dal Buonconsiglio al Duomo</a:t>
-            </a:r>
-            <a:endParaRPr lang="en-US" sz="1050" dirty="0"/>
-          </a:p>
-        </p:txBody>
-      </p:sp>
-      <p:sp>
-        <p:nvSpPr>
-          <p:cNvPr id="9" name="Shape 6"/>
-          <p:cNvSpPr/>
-          <p:nvPr/>
-        </p:nvSpPr>
-        <p:spPr>
-          <a:xfrm>
-            <a:off x="3300413" y="1619250"/>
-            <a:ext cx="2538413" cy="1190625"/>
-          </a:xfrm>
-          <a:prstGeom prst="roundRect">
-            <a:avLst>
-              <a:gd name="adj" fmla="val 8000"/>
-            </a:avLst>
-          </a:prstGeom>
-          <a:solidFill>
-            <a:srgbClr val="FBF7F0"/>
-          </a:solidFill>
-          <a:ln w="9525">
-            <a:solidFill>
-              <a:srgbClr val="E2D6C4"/>
-            </a:solidFill>
-            <a:prstDash val="solid"/>
-          </a:ln>
-        </p:spPr>
-      </p:sp>
-      <p:sp>
-        <p:nvSpPr>
-          <p:cNvPr id="10" name="Shape 7"/>
-          <p:cNvSpPr/>
-          <p:nvPr/>
-        </p:nvSpPr>
-        <p:spPr>
-          <a:xfrm>
-            <a:off x="3471863" y="1790700"/>
-            <a:ext cx="323850" cy="323850"/>
-          </a:xfrm>
-          <a:prstGeom prst="ellipse">
-            <a:avLst/>
-          </a:prstGeom>
-          <a:solidFill>
-            <a:srgbClr val="B5452C"/>
-          </a:solidFill>
-          <a:ln/>
-        </p:spPr>
-      </p:sp>
-      <p:pic>
-        <p:nvPicPr>
-          <p:cNvPr id="11" name="Image 1" descr="preencoded.png">    </p:cNvPr>
-          <p:cNvPicPr>
-            <a:picLocks noChangeAspect="1"/>
-          </p:cNvPicPr>
-          <p:nvPr/>
-        </p:nvPicPr>
-        <p:blipFill>
-          <a:blip r:embed="rId2"/>
-          <a:stretch>
-            <a:fillRect/>
-          </a:stretch>
-        </p:blipFill>
-        <p:spPr>
-          <a:xfrm>
-            <a:off x="3552825" y="1871663"/>
-            <a:ext cx="161925" cy="161925"/>
-          </a:xfrm>
-          <a:prstGeom prst="rect">
-            <a:avLst/>
-          </a:prstGeom>
-        </p:spPr>
-      </p:pic>
-      <p:sp>
-        <p:nvSpPr>
-          <p:cNvPr id="12" name="Text 8"/>
-          <p:cNvSpPr txBox="1"/>
-          <p:nvPr/>
-        </p:nvSpPr>
-        <p:spPr>
-          <a:xfrm>
-            <a:off x="3890962" y="1790700"/>
-            <a:ext cx="1824038" cy="323850"/>
-          </a:xfrm>
-          <a:prstGeom prst="rect">
-            <a:avLst/>
-          </a:prstGeom>
-          <a:noFill/>
-          <a:ln/>
-        </p:spPr>
-        <p:txBody>
-          <a:bodyPr wrap="square" lIns="0" tIns="0" rIns="0" bIns="0" rtlCol="0" anchor="ctr"/>
-          <a:lstStyle/>
-          <a:p>
-            <a:pPr indent="0" marL="0">
-              <a:buNone/>
-            </a:pPr>
-            <a:r>
-              <a:rPr lang="en-US" sz="1275" b="1" dirty="0">
-                <a:solidFill>
-                  <a:srgbClr val="1B2428"/>
-                </a:solidFill>
-                <a:latin typeface="Calibri" pitchFamily="34" charset="0"/>
-                <a:ea typeface="Calibri" pitchFamily="34" charset="-122"/>
-                <a:cs typeface="Calibri" pitchFamily="34" charset="-120"/>
-              </a:rPr>
-              <a:t>Arte nascosta</a:t>
-            </a:r>
-            <a:endParaRPr lang="en-US" sz="1275" dirty="0"/>
-          </a:p>
-        </p:txBody>
-      </p:sp>
-      <p:sp>
-        <p:nvSpPr>
-          <p:cNvPr id="13" name="Text 9"/>
-          <p:cNvSpPr txBox="1"/>
-          <p:nvPr/>
-        </p:nvSpPr>
-        <p:spPr>
-          <a:xfrm>
-            <a:off x="3471863" y="2238375"/>
-            <a:ext cx="2195513" cy="428625"/>
-          </a:xfrm>
-          <a:prstGeom prst="rect">
-            <a:avLst/>
-          </a:prstGeom>
-          <a:noFill/>
-          <a:ln/>
-        </p:spPr>
-        <p:txBody>
-          <a:bodyPr wrap="square" lIns="0" tIns="0" rIns="0" bIns="0" rtlCol="0" anchor="t"/>
-          <a:lstStyle/>
-          <a:p>
-            <a:pPr indent="0" marL="0">
-              <a:buNone/>
-            </a:pPr>
-            <a:r>
-              <a:rPr lang="en-US" sz="1050" dirty="0">
-                <a:solidFill>
-                  <a:srgbClr val="5A5F5E"/>
-                </a:solidFill>
-                <a:latin typeface="Calibri" pitchFamily="34" charset="0"/>
-                <a:ea typeface="Calibri" pitchFamily="34" charset="-122"/>
-                <a:cs typeface="Calibri" pitchFamily="34" charset="-120"/>
-              </a:rPr>
-              <a:t>Gli affreschi del centro, geolocalizzati e spiegati</a:t>
-            </a:r>
-            <a:endParaRPr lang="en-US" sz="1050" dirty="0"/>
-          </a:p>
-        </p:txBody>
-      </p:sp>
-      <p:sp>
-        <p:nvSpPr>
-          <p:cNvPr id="14" name="Shape 10"/>
-          <p:cNvSpPr/>
-          <p:nvPr/>
-        </p:nvSpPr>
-        <p:spPr>
-          <a:xfrm>
-            <a:off x="5991225" y="1619250"/>
-            <a:ext cx="2538413" cy="1190625"/>
-          </a:xfrm>
-          <a:prstGeom prst="roundRect">
-            <a:avLst>
-              <a:gd name="adj" fmla="val 8000"/>
-            </a:avLst>
-          </a:prstGeom>
-          <a:solidFill>
-            <a:srgbClr val="FBF7F0"/>
-          </a:solidFill>
-          <a:ln w="9525">
-            <a:solidFill>
-              <a:srgbClr val="E2D6C4"/>
-            </a:solidFill>
-            <a:prstDash val="solid"/>
-          </a:ln>
-        </p:spPr>
-      </p:sp>
-      <p:sp>
-        <p:nvSpPr>
-          <p:cNvPr id="15" name="Shape 11"/>
-          <p:cNvSpPr/>
-          <p:nvPr/>
-        </p:nvSpPr>
-        <p:spPr>
-          <a:xfrm>
-            <a:off x="6162675" y="1790700"/>
-            <a:ext cx="323850" cy="323850"/>
-          </a:xfrm>
-          <a:prstGeom prst="ellipse">
-            <a:avLst/>
-          </a:prstGeom>
-          <a:solidFill>
-            <a:srgbClr val="B5452C"/>
-          </a:solidFill>
-          <a:ln/>
-        </p:spPr>
-      </p:sp>
-      <p:pic>
-        <p:nvPicPr>
-          <p:cNvPr id="16" name="Image 2" descr="preencoded.png">    </p:cNvPr>
+          <p:cNvPr id="6" name="Image 0" descr="preencoded.png"/>
           <p:cNvPicPr>
             <a:picLocks noChangeAspect="1"/>
           </p:cNvPicPr>
@@ -2769,7 +2343,7 @@
         </p:blipFill>
         <p:spPr>
           <a:xfrm>
-            <a:off x="6243638" y="1871663"/>
+            <a:off x="862013" y="1871663"/>
             <a:ext cx="161925" cy="161925"/>
           </a:xfrm>
           <a:prstGeom prst="rect">
@@ -2779,13 +2353,13 @@
       </p:pic>
       <p:sp>
         <p:nvSpPr>
-          <p:cNvPr id="17" name="Text 12"/>
-          <p:cNvSpPr txBox="1"/>
-          <p:nvPr/>
-        </p:nvSpPr>
-        <p:spPr>
-          <a:xfrm>
-            <a:off x="6581775" y="1790700"/>
+          <p:cNvPr id="7" name="Text 4"/>
+          <p:cNvSpPr txBox="1"/>
+          <p:nvPr/>
+        </p:nvSpPr>
+        <p:spPr>
+          <a:xfrm>
+            <a:off x="1200150" y="1790700"/>
             <a:ext cx="1824038" cy="323850"/>
           </a:xfrm>
           <a:prstGeom prst="rect">
@@ -2798,7 +2372,7 @@
           <a:bodyPr wrap="square" lIns="0" tIns="0" rIns="0" bIns="0" rtlCol="0" anchor="ctr"/>
           <a:lstStyle/>
           <a:p>
-            <a:pPr indent="0" marL="0">
+            <a:pPr marL="0" indent="0">
               <a:buNone/>
             </a:pPr>
             <a:r>
@@ -2810,7 +2384,7 @@
                 <a:ea typeface="Calibri" pitchFamily="34" charset="-122"/>
                 <a:cs typeface="Calibri" pitchFamily="34" charset="-120"/>
               </a:rPr>
-              <a:t>Foto e aneddoti</a:t>
+              <a:t>Mappa dei luoghi</a:t>
             </a:r>
             <a:endParaRPr lang="en-US" sz="1275" dirty="0"/>
           </a:p>
@@ -2818,13 +2392,13 @@
       </p:sp>
       <p:sp>
         <p:nvSpPr>
-          <p:cNvPr id="18" name="Text 13"/>
-          <p:cNvSpPr txBox="1"/>
-          <p:nvPr/>
-        </p:nvSpPr>
-        <p:spPr>
-          <a:xfrm>
-            <a:off x="6162675" y="2238375"/>
+          <p:cNvPr id="8" name="Text 5"/>
+          <p:cNvSpPr txBox="1"/>
+          <p:nvPr/>
+        </p:nvSpPr>
+        <p:spPr>
+          <a:xfrm>
+            <a:off x="781050" y="2238375"/>
             <a:ext cx="2195513" cy="428625"/>
           </a:xfrm>
           <a:prstGeom prst="rect">
@@ -2837,7 +2411,7 @@
           <a:bodyPr wrap="square" lIns="0" tIns="0" rIns="0" bIns="0" rtlCol="0" anchor="t"/>
           <a:lstStyle/>
           <a:p>
-            <a:pPr indent="0" marL="0">
+            <a:pPr marL="0" indent="0">
               <a:buNone/>
             </a:pPr>
             <a:r>
@@ -2849,7 +2423,7 @@
                 <a:ea typeface="Calibri" pitchFamily="34" charset="-122"/>
                 <a:cs typeface="Calibri" pitchFamily="34" charset="-120"/>
               </a:rPr>
-              <a:t>Caricati dagli utenti su luoghi e famiglie</a:t>
+              <a:t>Dalla storia antica alla più recente</a:t>
             </a:r>
             <a:endParaRPr lang="en-US" sz="1050" dirty="0"/>
           </a:p>
@@ -2857,13 +2431,13 @@
       </p:sp>
       <p:sp>
         <p:nvSpPr>
-          <p:cNvPr id="19" name="Shape 14"/>
+          <p:cNvPr id="9" name="Shape 6"/>
           <p:cNvSpPr/>
           <p:nvPr/>
         </p:nvSpPr>
         <p:spPr>
           <a:xfrm>
-            <a:off x="609600" y="2962275"/>
+            <a:off x="3300413" y="1619250"/>
             <a:ext cx="2538413" cy="1190625"/>
           </a:xfrm>
           <a:prstGeom prst="roundRect">
@@ -2881,16 +2455,23 @@
             <a:prstDash val="solid"/>
           </a:ln>
         </p:spPr>
-      </p:sp>
-      <p:sp>
-        <p:nvSpPr>
-          <p:cNvPr id="20" name="Shape 15"/>
+        <p:txBody>
+          <a:bodyPr/>
+          <a:lstStyle/>
+          <a:p>
+            <a:endParaRPr lang="it-IT"/>
+          </a:p>
+        </p:txBody>
+      </p:sp>
+      <p:sp>
+        <p:nvSpPr>
+          <p:cNvPr id="10" name="Shape 7"/>
           <p:cNvSpPr/>
           <p:nvPr/>
         </p:nvSpPr>
         <p:spPr>
           <a:xfrm>
-            <a:off x="781050" y="3133725"/>
+            <a:off x="3471863" y="1790700"/>
             <a:ext cx="323850" cy="323850"/>
           </a:xfrm>
           <a:prstGeom prst="ellipse">
@@ -2901,10 +2482,17 @@
           </a:solidFill>
           <a:ln/>
         </p:spPr>
+        <p:txBody>
+          <a:bodyPr/>
+          <a:lstStyle/>
+          <a:p>
+            <a:endParaRPr lang="it-IT"/>
+          </a:p>
+        </p:txBody>
       </p:sp>
       <p:pic>
         <p:nvPicPr>
-          <p:cNvPr id="21" name="Image 3" descr="preencoded.png">    </p:cNvPr>
+          <p:cNvPr id="11" name="Image 1" descr="preencoded.png"/>
           <p:cNvPicPr>
             <a:picLocks noChangeAspect="1"/>
           </p:cNvPicPr>
@@ -2918,7 +2506,7 @@
         </p:blipFill>
         <p:spPr>
           <a:xfrm>
-            <a:off x="862013" y="3214688"/>
+            <a:off x="3552825" y="1871663"/>
             <a:ext cx="161925" cy="161925"/>
           </a:xfrm>
           <a:prstGeom prst="rect">
@@ -2928,13 +2516,13 @@
       </p:pic>
       <p:sp>
         <p:nvSpPr>
-          <p:cNvPr id="22" name="Text 16"/>
-          <p:cNvSpPr txBox="1"/>
-          <p:nvPr/>
-        </p:nvSpPr>
-        <p:spPr>
-          <a:xfrm>
-            <a:off x="1200150" y="3133725"/>
+          <p:cNvPr id="12" name="Text 8"/>
+          <p:cNvSpPr txBox="1"/>
+          <p:nvPr/>
+        </p:nvSpPr>
+        <p:spPr>
+          <a:xfrm>
+            <a:off x="3890962" y="1790700"/>
             <a:ext cx="1824038" cy="323850"/>
           </a:xfrm>
           <a:prstGeom prst="rect">
@@ -2947,7 +2535,7 @@
           <a:bodyPr wrap="square" lIns="0" tIns="0" rIns="0" bIns="0" rtlCol="0" anchor="ctr"/>
           <a:lstStyle/>
           <a:p>
-            <a:pPr indent="0" marL="0">
+            <a:pPr marL="0" indent="0">
               <a:buNone/>
             </a:pPr>
             <a:r>
@@ -2959,7 +2547,7 @@
                 <a:ea typeface="Calibri" pitchFamily="34" charset="-122"/>
                 <a:cs typeface="Calibri" pitchFamily="34" charset="-120"/>
               </a:rPr>
-              <a:t>Tradizioni</a:t>
+              <a:t>Arte nascosta</a:t>
             </a:r>
             <a:endParaRPr lang="en-US" sz="1275" dirty="0"/>
           </a:p>
@@ -2967,13 +2555,13 @@
       </p:sp>
       <p:sp>
         <p:nvSpPr>
-          <p:cNvPr id="23" name="Text 17"/>
-          <p:cNvSpPr txBox="1"/>
-          <p:nvPr/>
-        </p:nvSpPr>
-        <p:spPr>
-          <a:xfrm>
-            <a:off x="781050" y="3581400"/>
+          <p:cNvPr id="13" name="Text 9"/>
+          <p:cNvSpPr txBox="1"/>
+          <p:nvPr/>
+        </p:nvSpPr>
+        <p:spPr>
+          <a:xfrm>
+            <a:off x="3471863" y="2238375"/>
             <a:ext cx="2195513" cy="428625"/>
           </a:xfrm>
           <a:prstGeom prst="rect">
@@ -2986,7 +2574,7 @@
           <a:bodyPr wrap="square" lIns="0" tIns="0" rIns="0" bIns="0" rtlCol="0" anchor="t"/>
           <a:lstStyle/>
           <a:p>
-            <a:pPr indent="0" marL="0">
+            <a:pPr marL="0" indent="0">
               <a:buNone/>
             </a:pPr>
             <a:r>
@@ -2998,7 +2586,7 @@
                 <a:ea typeface="Calibri" pitchFamily="34" charset="-122"/>
                 <a:cs typeface="Calibri" pitchFamily="34" charset="-120"/>
               </a:rPr>
-              <a:t>Feste, usanze e storie del Trentino</a:t>
+              <a:t>Gli affreschi del centro, geolocalizzati e spiegati</a:t>
             </a:r>
             <a:endParaRPr lang="en-US" sz="1050" dirty="0"/>
           </a:p>
@@ -3006,13 +2594,13 @@
       </p:sp>
       <p:sp>
         <p:nvSpPr>
-          <p:cNvPr id="24" name="Shape 18"/>
+          <p:cNvPr id="14" name="Shape 10"/>
           <p:cNvSpPr/>
           <p:nvPr/>
         </p:nvSpPr>
         <p:spPr>
           <a:xfrm>
-            <a:off x="3300413" y="2962275"/>
+            <a:off x="5991225" y="1619250"/>
             <a:ext cx="2538413" cy="1190625"/>
           </a:xfrm>
           <a:prstGeom prst="roundRect">
@@ -3030,16 +2618,23 @@
             <a:prstDash val="solid"/>
           </a:ln>
         </p:spPr>
-      </p:sp>
-      <p:sp>
-        <p:nvSpPr>
-          <p:cNvPr id="25" name="Shape 19"/>
+        <p:txBody>
+          <a:bodyPr/>
+          <a:lstStyle/>
+          <a:p>
+            <a:endParaRPr lang="it-IT"/>
+          </a:p>
+        </p:txBody>
+      </p:sp>
+      <p:sp>
+        <p:nvSpPr>
+          <p:cNvPr id="15" name="Shape 11"/>
           <p:cNvSpPr/>
           <p:nvPr/>
         </p:nvSpPr>
         <p:spPr>
           <a:xfrm>
-            <a:off x="3471863" y="3133725"/>
+            <a:off x="6162675" y="1790700"/>
             <a:ext cx="323850" cy="323850"/>
           </a:xfrm>
           <a:prstGeom prst="ellipse">
@@ -3050,10 +2645,17 @@
           </a:solidFill>
           <a:ln/>
         </p:spPr>
+        <p:txBody>
+          <a:bodyPr/>
+          <a:lstStyle/>
+          <a:p>
+            <a:endParaRPr lang="it-IT"/>
+          </a:p>
+        </p:txBody>
       </p:sp>
       <p:pic>
         <p:nvPicPr>
-          <p:cNvPr id="26" name="Image 4" descr="preencoded.png">    </p:cNvPr>
+          <p:cNvPr id="16" name="Image 2" descr="preencoded.png"/>
           <p:cNvPicPr>
             <a:picLocks noChangeAspect="1"/>
           </p:cNvPicPr>
@@ -3067,7 +2669,7 @@
         </p:blipFill>
         <p:spPr>
           <a:xfrm>
-            <a:off x="3552825" y="3214688"/>
+            <a:off x="6243638" y="1871663"/>
             <a:ext cx="161925" cy="161925"/>
           </a:xfrm>
           <a:prstGeom prst="rect">
@@ -3077,13 +2679,13 @@
       </p:pic>
       <p:sp>
         <p:nvSpPr>
-          <p:cNvPr id="27" name="Text 20"/>
-          <p:cNvSpPr txBox="1"/>
-          <p:nvPr/>
-        </p:nvSpPr>
-        <p:spPr>
-          <a:xfrm>
-            <a:off x="3890962" y="3133725"/>
+          <p:cNvPr id="17" name="Text 12"/>
+          <p:cNvSpPr txBox="1"/>
+          <p:nvPr/>
+        </p:nvSpPr>
+        <p:spPr>
+          <a:xfrm>
+            <a:off x="6581775" y="1790700"/>
             <a:ext cx="1824038" cy="323850"/>
           </a:xfrm>
           <a:prstGeom prst="rect">
@@ -3096,7 +2698,7 @@
           <a:bodyPr wrap="square" lIns="0" tIns="0" rIns="0" bIns="0" rtlCol="0" anchor="ctr"/>
           <a:lstStyle/>
           <a:p>
-            <a:pPr indent="0" marL="0">
+            <a:pPr marL="0" indent="0">
               <a:buNone/>
             </a:pPr>
             <a:r>
@@ -3108,7 +2710,7 @@
                 <a:ea typeface="Calibri" pitchFamily="34" charset="-122"/>
                 <a:cs typeface="Calibri" pitchFamily="34" charset="-120"/>
               </a:rPr>
-              <a:t>Mappa del gusto</a:t>
+              <a:t>Foto e aneddoti</a:t>
             </a:r>
             <a:endParaRPr lang="en-US" sz="1275" dirty="0"/>
           </a:p>
@@ -3116,13 +2718,13 @@
       </p:sp>
       <p:sp>
         <p:nvSpPr>
-          <p:cNvPr id="28" name="Text 21"/>
-          <p:cNvSpPr txBox="1"/>
-          <p:nvPr/>
-        </p:nvSpPr>
-        <p:spPr>
-          <a:xfrm>
-            <a:off x="3471863" y="3581400"/>
+          <p:cNvPr id="18" name="Text 13"/>
+          <p:cNvSpPr txBox="1"/>
+          <p:nvPr/>
+        </p:nvSpPr>
+        <p:spPr>
+          <a:xfrm>
+            <a:off x="6162675" y="2238375"/>
             <a:ext cx="2195513" cy="428625"/>
           </a:xfrm>
           <a:prstGeom prst="rect">
@@ -3135,7 +2737,7 @@
           <a:bodyPr wrap="square" lIns="0" tIns="0" rIns="0" bIns="0" rtlCol="0" anchor="t"/>
           <a:lstStyle/>
           <a:p>
-            <a:pPr indent="0" marL="0">
+            <a:pPr marL="0" indent="0">
               <a:buNone/>
             </a:pPr>
             <a:r>
@@ -3147,7 +2749,7 @@
                 <a:ea typeface="Calibri" pitchFamily="34" charset="-122"/>
                 <a:cs typeface="Calibri" pitchFamily="34" charset="-120"/>
               </a:rPr>
-              <a:t>Dove assaggiare i piatti tipici</a:t>
+              <a:t>Caricati dagli utenti su luoghi e famiglie</a:t>
             </a:r>
             <a:endParaRPr lang="en-US" sz="1050" dirty="0"/>
           </a:p>
@@ -3155,13 +2757,13 @@
       </p:sp>
       <p:sp>
         <p:nvSpPr>
-          <p:cNvPr id="29" name="Shape 22"/>
+          <p:cNvPr id="19" name="Shape 14"/>
           <p:cNvSpPr/>
           <p:nvPr/>
         </p:nvSpPr>
         <p:spPr>
           <a:xfrm>
-            <a:off x="5991225" y="2962275"/>
+            <a:off x="609600" y="2962275"/>
             <a:ext cx="2538413" cy="1190625"/>
           </a:xfrm>
           <a:prstGeom prst="roundRect">
@@ -3170,39 +2772,53 @@
             </a:avLst>
           </a:prstGeom>
           <a:solidFill>
-            <a:srgbClr val="1B2428"/>
+            <a:srgbClr val="FBF7F0"/>
           </a:solidFill>
           <a:ln w="9525">
             <a:solidFill>
-              <a:srgbClr val="1B2428"/>
+              <a:srgbClr val="E2D6C4"/>
             </a:solidFill>
             <a:prstDash val="solid"/>
           </a:ln>
         </p:spPr>
-      </p:sp>
-      <p:sp>
-        <p:nvSpPr>
-          <p:cNvPr id="30" name="Shape 23"/>
+        <p:txBody>
+          <a:bodyPr/>
+          <a:lstStyle/>
+          <a:p>
+            <a:endParaRPr lang="it-IT"/>
+          </a:p>
+        </p:txBody>
+      </p:sp>
+      <p:sp>
+        <p:nvSpPr>
+          <p:cNvPr id="20" name="Shape 15"/>
           <p:cNvSpPr/>
           <p:nvPr/>
         </p:nvSpPr>
         <p:spPr>
           <a:xfrm>
-            <a:off x="6162675" y="3133725"/>
+            <a:off x="781050" y="3133725"/>
             <a:ext cx="323850" cy="323850"/>
           </a:xfrm>
           <a:prstGeom prst="ellipse">
             <a:avLst/>
           </a:prstGeom>
           <a:solidFill>
-            <a:srgbClr val="D99A2B"/>
-          </a:solidFill>
-          <a:ln/>
-        </p:spPr>
+            <a:srgbClr val="B5452C"/>
+          </a:solidFill>
+          <a:ln/>
+        </p:spPr>
+        <p:txBody>
+          <a:bodyPr/>
+          <a:lstStyle/>
+          <a:p>
+            <a:endParaRPr lang="it-IT"/>
+          </a:p>
+        </p:txBody>
       </p:sp>
       <p:pic>
         <p:nvPicPr>
-          <p:cNvPr id="31" name="Image 5" descr="preencoded.png">    </p:cNvPr>
+          <p:cNvPr id="21" name="Image 3" descr="preencoded.png"/>
           <p:cNvPicPr>
             <a:picLocks noChangeAspect="1"/>
           </p:cNvPicPr>
@@ -3216,7 +2832,7 @@
         </p:blipFill>
         <p:spPr>
           <a:xfrm>
-            <a:off x="6243638" y="3214688"/>
+            <a:off x="862013" y="3214688"/>
             <a:ext cx="161925" cy="161925"/>
           </a:xfrm>
           <a:prstGeom prst="rect">
@@ -3226,13 +2842,13 @@
       </p:pic>
       <p:sp>
         <p:nvSpPr>
-          <p:cNvPr id="32" name="Text 24"/>
-          <p:cNvSpPr txBox="1"/>
-          <p:nvPr/>
-        </p:nvSpPr>
-        <p:spPr>
-          <a:xfrm>
-            <a:off x="6581775" y="3133725"/>
+          <p:cNvPr id="22" name="Text 16"/>
+          <p:cNvSpPr txBox="1"/>
+          <p:nvPr/>
+        </p:nvSpPr>
+        <p:spPr>
+          <a:xfrm>
+            <a:off x="1200150" y="3133725"/>
             <a:ext cx="1824038" cy="323850"/>
           </a:xfrm>
           <a:prstGeom prst="rect">
@@ -3245,101 +2861,446 @@
           <a:bodyPr wrap="square" lIns="0" tIns="0" rIns="0" bIns="0" rtlCol="0" anchor="ctr"/>
           <a:lstStyle/>
           <a:p>
-            <a:pPr indent="0" marL="0">
-              <a:buNone/>
-            </a:pPr>
-            <a:r>
-              <a:rPr lang="en-US" sz="1275" b="1" dirty="0">
-                <a:solidFill>
-                  <a:srgbClr val="F4EEE4"/>
+            <a:pPr marL="0" indent="0">
+              <a:buNone/>
+            </a:pPr>
+            <a:r>
+              <a:rPr lang="en-US" sz="1275" b="1" dirty="0" err="1">
+                <a:solidFill>
+                  <a:srgbClr val="1B2428"/>
                 </a:solidFill>
                 <a:latin typeface="Calibri" pitchFamily="34" charset="0"/>
                 <a:ea typeface="Calibri" pitchFamily="34" charset="-122"/>
                 <a:cs typeface="Calibri" pitchFamily="34" charset="-120"/>
               </a:rPr>
-              <a:t>“Dov’era?”</a:t>
-            </a:r>
-            <a:endParaRPr lang="en-US" sz="1275" dirty="0"/>
-          </a:p>
-        </p:txBody>
-      </p:sp>
-      <p:sp>
-        <p:nvSpPr>
-          <p:cNvPr id="33" name="Text 25"/>
-          <p:cNvSpPr txBox="1"/>
-          <p:nvPr/>
-        </p:nvSpPr>
-        <p:spPr>
-          <a:xfrm>
-            <a:off x="6162675" y="3581400"/>
-            <a:ext cx="2195513" cy="428625"/>
-          </a:xfrm>
-          <a:prstGeom prst="rect">
-            <a:avLst/>
-          </a:prstGeom>
-          <a:noFill/>
-          <a:ln/>
-        </p:spPr>
-        <p:txBody>
-          <a:bodyPr wrap="square" lIns="0" tIns="0" rIns="0" bIns="0" rtlCol="0" anchor="t"/>
-          <a:lstStyle/>
-          <a:p>
-            <a:pPr indent="0" marL="0">
-              <a:buNone/>
-            </a:pPr>
-            <a:r>
-              <a:rPr lang="en-US" sz="1050" dirty="0">
-                <a:solidFill>
-                  <a:srgbClr val="C9CFCB"/>
+              <a:t>Tradizioni</a:t>
+            </a:r>
+            <a:r>
+              <a:rPr lang="en-US" sz="1275" b="1" dirty="0">
+                <a:solidFill>
+                  <a:srgbClr val="1B2428"/>
                 </a:solidFill>
                 <a:latin typeface="Calibri" pitchFamily="34" charset="0"/>
                 <a:ea typeface="Calibri" pitchFamily="34" charset="-122"/>
                 <a:cs typeface="Calibri" pitchFamily="34" charset="-120"/>
               </a:rPr>
-              <a:t>Minigame: indovina il luogo da una foto storica</a:t>
-            </a:r>
-            <a:endParaRPr lang="en-US" sz="1050" dirty="0"/>
-          </a:p>
-        </p:txBody>
-      </p:sp>
-      <p:sp>
-        <p:nvSpPr>
-          <p:cNvPr id="34" name="Text 26"/>
-          <p:cNvSpPr txBox="1"/>
-          <p:nvPr/>
-        </p:nvSpPr>
-        <p:spPr>
-          <a:xfrm>
-            <a:off x="609600" y="4572000"/>
-            <a:ext cx="7924800" cy="190500"/>
-          </a:xfrm>
-          <a:prstGeom prst="rect">
-            <a:avLst/>
-          </a:prstGeom>
-          <a:noFill/>
-          <a:ln/>
-        </p:spPr>
-        <p:txBody>
-          <a:bodyPr wrap="square" lIns="0" tIns="0" rIns="0" bIns="0" rtlCol="0" anchor="t"/>
-          <a:lstStyle/>
-          <a:p>
-            <a:pPr indent="0" marL="0">
-              <a:buNone/>
-            </a:pPr>
-            <a:r>
-              <a:rPr lang="en-US" sz="975" b="1" dirty="0">
-                <a:solidFill>
-                  <a:srgbClr val="B5452C"/>
+              <a:t> e </a:t>
+            </a:r>
+            <a:r>
+              <a:rPr lang="en-US" sz="1275" b="1" dirty="0" err="1">
+                <a:solidFill>
+                  <a:srgbClr val="1B2428"/>
                 </a:solidFill>
                 <a:latin typeface="Calibri" pitchFamily="34" charset="0"/>
                 <a:ea typeface="Calibri" pitchFamily="34" charset="-122"/>
                 <a:cs typeface="Calibri" pitchFamily="34" charset="-120"/>
               </a:rPr>
+              <a:t>cultura</a:t>
+            </a:r>
+            <a:endParaRPr lang="en-US" sz="1275" dirty="0"/>
+          </a:p>
+        </p:txBody>
+      </p:sp>
+      <p:sp>
+        <p:nvSpPr>
+          <p:cNvPr id="23" name="Text 17"/>
+          <p:cNvSpPr txBox="1"/>
+          <p:nvPr/>
+        </p:nvSpPr>
+        <p:spPr>
+          <a:xfrm>
+            <a:off x="781050" y="3581400"/>
+            <a:ext cx="2195513" cy="428625"/>
+          </a:xfrm>
+          <a:prstGeom prst="rect">
+            <a:avLst/>
+          </a:prstGeom>
+          <a:noFill/>
+          <a:ln/>
+        </p:spPr>
+        <p:txBody>
+          <a:bodyPr wrap="square" lIns="0" tIns="0" rIns="0" bIns="0" rtlCol="0" anchor="t"/>
+          <a:lstStyle/>
+          <a:p>
+            <a:pPr marL="0" indent="0">
+              <a:buNone/>
+            </a:pPr>
+            <a:r>
+              <a:rPr lang="en-US" sz="1050" dirty="0">
+                <a:solidFill>
+                  <a:srgbClr val="5A5F5E"/>
+                </a:solidFill>
+                <a:latin typeface="Calibri" pitchFamily="34" charset="0"/>
+                <a:ea typeface="Calibri" pitchFamily="34" charset="-122"/>
+                <a:cs typeface="Calibri" pitchFamily="34" charset="-120"/>
+              </a:rPr>
+              <a:t>Feste, usanze e storie del Trentino</a:t>
+            </a:r>
+            <a:endParaRPr lang="en-US" sz="1050" dirty="0"/>
+          </a:p>
+        </p:txBody>
+      </p:sp>
+      <p:sp>
+        <p:nvSpPr>
+          <p:cNvPr id="24" name="Shape 18"/>
+          <p:cNvSpPr/>
+          <p:nvPr/>
+        </p:nvSpPr>
+        <p:spPr>
+          <a:xfrm>
+            <a:off x="3300413" y="2962275"/>
+            <a:ext cx="2538413" cy="1190625"/>
+          </a:xfrm>
+          <a:prstGeom prst="roundRect">
+            <a:avLst>
+              <a:gd name="adj" fmla="val 8000"/>
+            </a:avLst>
+          </a:prstGeom>
+          <a:solidFill>
+            <a:srgbClr val="FBF7F0"/>
+          </a:solidFill>
+          <a:ln w="9525">
+            <a:solidFill>
+              <a:srgbClr val="E2D6C4"/>
+            </a:solidFill>
+            <a:prstDash val="solid"/>
+          </a:ln>
+        </p:spPr>
+        <p:txBody>
+          <a:bodyPr/>
+          <a:lstStyle/>
+          <a:p>
+            <a:endParaRPr lang="it-IT"/>
+          </a:p>
+        </p:txBody>
+      </p:sp>
+      <p:sp>
+        <p:nvSpPr>
+          <p:cNvPr id="25" name="Shape 19"/>
+          <p:cNvSpPr/>
+          <p:nvPr/>
+        </p:nvSpPr>
+        <p:spPr>
+          <a:xfrm>
+            <a:off x="3471863" y="3133725"/>
+            <a:ext cx="323850" cy="323850"/>
+          </a:xfrm>
+          <a:prstGeom prst="ellipse">
+            <a:avLst/>
+          </a:prstGeom>
+          <a:solidFill>
+            <a:srgbClr val="B5452C"/>
+          </a:solidFill>
+          <a:ln/>
+        </p:spPr>
+        <p:txBody>
+          <a:bodyPr/>
+          <a:lstStyle/>
+          <a:p>
+            <a:endParaRPr lang="it-IT"/>
+          </a:p>
+        </p:txBody>
+      </p:sp>
+      <p:pic>
+        <p:nvPicPr>
+          <p:cNvPr id="26" name="Image 4" descr="preencoded.png"/>
+          <p:cNvPicPr>
+            <a:picLocks noChangeAspect="1"/>
+          </p:cNvPicPr>
+          <p:nvPr/>
+        </p:nvPicPr>
+        <p:blipFill>
+          <a:blip r:embed="rId7"/>
+          <a:stretch>
+            <a:fillRect/>
+          </a:stretch>
+        </p:blipFill>
+        <p:spPr>
+          <a:xfrm>
+            <a:off x="3552825" y="3214688"/>
+            <a:ext cx="161925" cy="161925"/>
+          </a:xfrm>
+          <a:prstGeom prst="rect">
+            <a:avLst/>
+          </a:prstGeom>
+        </p:spPr>
+      </p:pic>
+      <p:sp>
+        <p:nvSpPr>
+          <p:cNvPr id="27" name="Text 20"/>
+          <p:cNvSpPr txBox="1"/>
+          <p:nvPr/>
+        </p:nvSpPr>
+        <p:spPr>
+          <a:xfrm>
+            <a:off x="3890962" y="3133725"/>
+            <a:ext cx="1824038" cy="323850"/>
+          </a:xfrm>
+          <a:prstGeom prst="rect">
+            <a:avLst/>
+          </a:prstGeom>
+          <a:noFill/>
+          <a:ln/>
+        </p:spPr>
+        <p:txBody>
+          <a:bodyPr wrap="square" lIns="0" tIns="0" rIns="0" bIns="0" rtlCol="0" anchor="ctr"/>
+          <a:lstStyle/>
+          <a:p>
+            <a:pPr marL="0" indent="0">
+              <a:buNone/>
+            </a:pPr>
+            <a:r>
+              <a:rPr lang="en-US" sz="1275" b="1" dirty="0">
+                <a:solidFill>
+                  <a:srgbClr val="1B2428"/>
+                </a:solidFill>
+                <a:latin typeface="Calibri" pitchFamily="34" charset="0"/>
+                <a:ea typeface="Calibri" pitchFamily="34" charset="-122"/>
+                <a:cs typeface="Calibri" pitchFamily="34" charset="-120"/>
+              </a:rPr>
+              <a:t>Mappa del gusto</a:t>
+            </a:r>
+            <a:endParaRPr lang="en-US" sz="1275" dirty="0"/>
+          </a:p>
+        </p:txBody>
+      </p:sp>
+      <p:sp>
+        <p:nvSpPr>
+          <p:cNvPr id="28" name="Text 21"/>
+          <p:cNvSpPr txBox="1"/>
+          <p:nvPr/>
+        </p:nvSpPr>
+        <p:spPr>
+          <a:xfrm>
+            <a:off x="3471863" y="3581400"/>
+            <a:ext cx="2195513" cy="428625"/>
+          </a:xfrm>
+          <a:prstGeom prst="rect">
+            <a:avLst/>
+          </a:prstGeom>
+          <a:noFill/>
+          <a:ln/>
+        </p:spPr>
+        <p:txBody>
+          <a:bodyPr wrap="square" lIns="0" tIns="0" rIns="0" bIns="0" rtlCol="0" anchor="t"/>
+          <a:lstStyle/>
+          <a:p>
+            <a:pPr marL="0" indent="0">
+              <a:buNone/>
+            </a:pPr>
+            <a:r>
+              <a:rPr lang="en-US" sz="1050" dirty="0">
+                <a:solidFill>
+                  <a:srgbClr val="5A5F5E"/>
+                </a:solidFill>
+                <a:latin typeface="Calibri" pitchFamily="34" charset="0"/>
+                <a:ea typeface="Calibri" pitchFamily="34" charset="-122"/>
+                <a:cs typeface="Calibri" pitchFamily="34" charset="-120"/>
+              </a:rPr>
+              <a:t>Dove assaggiare i piatti tipici</a:t>
+            </a:r>
+            <a:endParaRPr lang="en-US" sz="1050" dirty="0"/>
+          </a:p>
+        </p:txBody>
+      </p:sp>
+      <p:sp>
+        <p:nvSpPr>
+          <p:cNvPr id="29" name="Shape 22"/>
+          <p:cNvSpPr/>
+          <p:nvPr/>
+        </p:nvSpPr>
+        <p:spPr>
+          <a:xfrm>
+            <a:off x="5991225" y="2962275"/>
+            <a:ext cx="2538413" cy="1190625"/>
+          </a:xfrm>
+          <a:prstGeom prst="roundRect">
+            <a:avLst>
+              <a:gd name="adj" fmla="val 8000"/>
+            </a:avLst>
+          </a:prstGeom>
+          <a:solidFill>
+            <a:srgbClr val="1B2428"/>
+          </a:solidFill>
+          <a:ln w="9525">
+            <a:solidFill>
+              <a:srgbClr val="1B2428"/>
+            </a:solidFill>
+            <a:prstDash val="solid"/>
+          </a:ln>
+        </p:spPr>
+        <p:txBody>
+          <a:bodyPr/>
+          <a:lstStyle/>
+          <a:p>
+            <a:endParaRPr lang="it-IT"/>
+          </a:p>
+        </p:txBody>
+      </p:sp>
+      <p:sp>
+        <p:nvSpPr>
+          <p:cNvPr id="30" name="Shape 23"/>
+          <p:cNvSpPr/>
+          <p:nvPr/>
+        </p:nvSpPr>
+        <p:spPr>
+          <a:xfrm>
+            <a:off x="6162675" y="3133725"/>
+            <a:ext cx="323850" cy="323850"/>
+          </a:xfrm>
+          <a:prstGeom prst="ellipse">
+            <a:avLst/>
+          </a:prstGeom>
+          <a:solidFill>
+            <a:srgbClr val="D99A2B"/>
+          </a:solidFill>
+          <a:ln/>
+        </p:spPr>
+        <p:txBody>
+          <a:bodyPr/>
+          <a:lstStyle/>
+          <a:p>
+            <a:endParaRPr lang="it-IT"/>
+          </a:p>
+        </p:txBody>
+      </p:sp>
+      <p:pic>
+        <p:nvPicPr>
+          <p:cNvPr id="31" name="Image 5" descr="preencoded.png"/>
+          <p:cNvPicPr>
+            <a:picLocks noChangeAspect="1"/>
+          </p:cNvPicPr>
+          <p:nvPr/>
+        </p:nvPicPr>
+        <p:blipFill>
+          <a:blip r:embed="rId8"/>
+          <a:stretch>
+            <a:fillRect/>
+          </a:stretch>
+        </p:blipFill>
+        <p:spPr>
+          <a:xfrm>
+            <a:off x="6243638" y="3214688"/>
+            <a:ext cx="161925" cy="161925"/>
+          </a:xfrm>
+          <a:prstGeom prst="rect">
+            <a:avLst/>
+          </a:prstGeom>
+        </p:spPr>
+      </p:pic>
+      <p:sp>
+        <p:nvSpPr>
+          <p:cNvPr id="32" name="Text 24"/>
+          <p:cNvSpPr txBox="1"/>
+          <p:nvPr/>
+        </p:nvSpPr>
+        <p:spPr>
+          <a:xfrm>
+            <a:off x="6581775" y="3133725"/>
+            <a:ext cx="1824038" cy="323850"/>
+          </a:xfrm>
+          <a:prstGeom prst="rect">
+            <a:avLst/>
+          </a:prstGeom>
+          <a:noFill/>
+          <a:ln/>
+        </p:spPr>
+        <p:txBody>
+          <a:bodyPr wrap="square" lIns="0" tIns="0" rIns="0" bIns="0" rtlCol="0" anchor="ctr"/>
+          <a:lstStyle/>
+          <a:p>
+            <a:pPr marL="0" indent="0">
+              <a:buNone/>
+            </a:pPr>
+            <a:r>
+              <a:rPr lang="en-US" sz="1275" b="1" dirty="0">
+                <a:solidFill>
+                  <a:srgbClr val="F4EEE4"/>
+                </a:solidFill>
+                <a:latin typeface="Calibri" pitchFamily="34" charset="0"/>
+                <a:ea typeface="Calibri" pitchFamily="34" charset="-122"/>
+                <a:cs typeface="Calibri" pitchFamily="34" charset="-120"/>
+              </a:rPr>
+              <a:t>“Dov’era?”</a:t>
+            </a:r>
+            <a:endParaRPr lang="en-US" sz="1275" dirty="0"/>
+          </a:p>
+        </p:txBody>
+      </p:sp>
+      <p:sp>
+        <p:nvSpPr>
+          <p:cNvPr id="33" name="Text 25"/>
+          <p:cNvSpPr txBox="1"/>
+          <p:nvPr/>
+        </p:nvSpPr>
+        <p:spPr>
+          <a:xfrm>
+            <a:off x="6162675" y="3581400"/>
+            <a:ext cx="2195513" cy="428625"/>
+          </a:xfrm>
+          <a:prstGeom prst="rect">
+            <a:avLst/>
+          </a:prstGeom>
+          <a:noFill/>
+          <a:ln/>
+        </p:spPr>
+        <p:txBody>
+          <a:bodyPr wrap="square" lIns="0" tIns="0" rIns="0" bIns="0" rtlCol="0" anchor="t"/>
+          <a:lstStyle/>
+          <a:p>
+            <a:pPr marL="0" indent="0">
+              <a:buNone/>
+            </a:pPr>
+            <a:r>
+              <a:rPr lang="en-US" sz="1050" dirty="0">
+                <a:solidFill>
+                  <a:srgbClr val="C9CFCB"/>
+                </a:solidFill>
+                <a:latin typeface="Calibri" pitchFamily="34" charset="0"/>
+                <a:ea typeface="Calibri" pitchFamily="34" charset="-122"/>
+                <a:cs typeface="Calibri" pitchFamily="34" charset="-120"/>
+              </a:rPr>
+              <a:t>Minigame: indovina il luogo da una foto storica</a:t>
+            </a:r>
+            <a:endParaRPr lang="en-US" sz="1050" dirty="0"/>
+          </a:p>
+        </p:txBody>
+      </p:sp>
+      <p:sp>
+        <p:nvSpPr>
+          <p:cNvPr id="34" name="Text 26"/>
+          <p:cNvSpPr txBox="1"/>
+          <p:nvPr/>
+        </p:nvSpPr>
+        <p:spPr>
+          <a:xfrm>
+            <a:off x="609600" y="4572000"/>
+            <a:ext cx="7924800" cy="190500"/>
+          </a:xfrm>
+          <a:prstGeom prst="rect">
+            <a:avLst/>
+          </a:prstGeom>
+          <a:noFill/>
+          <a:ln/>
+        </p:spPr>
+        <p:txBody>
+          <a:bodyPr wrap="square" lIns="0" tIns="0" rIns="0" bIns="0" rtlCol="0" anchor="t"/>
+          <a:lstStyle/>
+          <a:p>
+            <a:pPr marL="0" indent="0">
+              <a:buNone/>
+            </a:pPr>
+            <a:r>
+              <a:rPr lang="en-US" sz="975" b="1" dirty="0">
+                <a:solidFill>
+                  <a:srgbClr val="B5452C"/>
+                </a:solidFill>
+                <a:latin typeface="Calibri" pitchFamily="34" charset="0"/>
+                <a:ea typeface="Calibri" pitchFamily="34" charset="-122"/>
+                <a:cs typeface="Calibri" pitchFamily="34" charset="-120"/>
+              </a:rPr>
               <a:t>Innovazione</a:t>
             </a:r>
-            <a:pPr indent="0" marL="0">
-              <a:buNone/>
-            </a:pPr>
             <a:r>
               <a:rPr lang="en-US" sz="975" dirty="0">
                 <a:solidFill>
@@ -3371,6 +3332,7 @@
         <a:solidFill>
           <a:srgbClr val="F4EEE4"/>
         </a:solidFill>
+        <a:effectLst/>
       </p:bgPr>
     </p:bg>
     <p:spTree>
@@ -3408,7 +3370,7 @@
           <a:bodyPr wrap="square" lIns="0" tIns="0" rIns="0" bIns="0" rtlCol="0" anchor="t"/>
           <a:lstStyle/>
           <a:p>
-            <a:pPr indent="0" marL="0">
+            <a:pPr marL="0" indent="0">
               <a:buNone/>
             </a:pPr>
             <a:r>
@@ -3447,7 +3409,7 @@
           <a:bodyPr wrap="square" lIns="0" tIns="0" rIns="0" bIns="0" rtlCol="0" anchor="t"/>
           <a:lstStyle/>
           <a:p>
-            <a:pPr indent="0" marL="0">
+            <a:pPr marL="0" indent="0">
               <a:buNone/>
             </a:pPr>
             <a:r>
@@ -3491,6 +3453,13 @@
             <a:prstDash val="solid"/>
           </a:ln>
         </p:spPr>
+        <p:txBody>
+          <a:bodyPr/>
+          <a:lstStyle/>
+          <a:p>
+            <a:endParaRPr lang="it-IT"/>
+          </a:p>
+        </p:txBody>
       </p:sp>
       <p:sp>
         <p:nvSpPr>
@@ -3511,308 +3480,17 @@
           </a:solidFill>
           <a:ln/>
         </p:spPr>
+        <p:txBody>
+          <a:bodyPr/>
+          <a:lstStyle/>
+          <a:p>
+            <a:endParaRPr lang="it-IT"/>
+          </a:p>
+        </p:txBody>
       </p:sp>
       <p:pic>
         <p:nvPicPr>
-          <p:cNvPr id="6" name="Image 0" descr="preencoded.png">    </p:cNvPr>
-          <p:cNvPicPr>
-            <a:picLocks noChangeAspect="1"/>
-          </p:cNvPicPr>
-          <p:nvPr/>
-        </p:nvPicPr>
-        <p:blipFill>
-          <a:blip r:embed="rId1"/>
-          <a:stretch>
-            <a:fillRect/>
-          </a:stretch>
-        </p:blipFill>
-        <p:spPr>
-          <a:xfrm>
-            <a:off x="881063" y="1866900"/>
-            <a:ext cx="161925" cy="161925"/>
-          </a:xfrm>
-          <a:prstGeom prst="rect">
-            <a:avLst/>
-          </a:prstGeom>
-        </p:spPr>
-      </p:pic>
-      <p:sp>
-        <p:nvSpPr>
-          <p:cNvPr id="7" name="Text 4"/>
-          <p:cNvSpPr txBox="1"/>
-          <p:nvPr/>
-        </p:nvSpPr>
-        <p:spPr>
-          <a:xfrm>
-            <a:off x="1219200" y="1785938"/>
-            <a:ext cx="1809750" cy="323850"/>
-          </a:xfrm>
-          <a:prstGeom prst="rect">
-            <a:avLst/>
-          </a:prstGeom>
-          <a:noFill/>
-          <a:ln/>
-        </p:spPr>
-        <p:txBody>
-          <a:bodyPr wrap="square" lIns="0" tIns="0" rIns="0" bIns="0" rtlCol="0" anchor="ctr"/>
-          <a:lstStyle/>
-          <a:p>
-            <a:pPr indent="0" marL="0">
-              <a:buNone/>
-            </a:pPr>
-            <a:r>
-              <a:rPr lang="en-US" sz="1650" b="1" dirty="0">
-                <a:solidFill>
-                  <a:srgbClr val="1B2428"/>
-                </a:solidFill>
-                <a:latin typeface="Cambria" pitchFamily="34" charset="0"/>
-                <a:ea typeface="Cambria" pitchFamily="34" charset="-122"/>
-                <a:cs typeface="Cambria" pitchFamily="34" charset="-120"/>
-              </a:rPr>
-              <a:t>Turisti</a:t>
-            </a:r>
-            <a:endParaRPr lang="en-US" sz="1650" dirty="0"/>
-          </a:p>
-        </p:txBody>
-      </p:sp>
-      <p:sp>
-        <p:nvSpPr>
-          <p:cNvPr id="8" name="Text 5"/>
-          <p:cNvSpPr txBox="1"/>
-          <p:nvPr/>
-        </p:nvSpPr>
-        <p:spPr>
-          <a:xfrm>
-            <a:off x="800100" y="2243138"/>
-            <a:ext cx="2157413" cy="428625"/>
-          </a:xfrm>
-          <a:prstGeom prst="rect">
-            <a:avLst/>
-          </a:prstGeom>
-          <a:noFill/>
-          <a:ln/>
-        </p:spPr>
-        <p:txBody>
-          <a:bodyPr wrap="square" lIns="0" tIns="0" rIns="0" bIns="0" rtlCol="0" anchor="t"/>
-          <a:lstStyle/>
-          <a:p>
-            <a:pPr indent="0" marL="0">
-              <a:buNone/>
-            </a:pPr>
-            <a:r>
-              <a:rPr lang="en-US" sz="1050" dirty="0">
-                <a:solidFill>
-                  <a:srgbClr val="5A5F5E"/>
-                </a:solidFill>
-                <a:latin typeface="Calibri" pitchFamily="34" charset="0"/>
-                <a:ea typeface="Calibri" pitchFamily="34" charset="-122"/>
-                <a:cs typeface="Calibri" pitchFamily="34" charset="-120"/>
-              </a:rPr>
-              <a:t>Itinerari originali, oltre i soliti luoghi</a:t>
-            </a:r>
-            <a:endParaRPr lang="en-US" sz="1050" dirty="0"/>
-          </a:p>
-        </p:txBody>
-      </p:sp>
-      <p:sp>
-        <p:nvSpPr>
-          <p:cNvPr id="9" name="Shape 6"/>
-          <p:cNvSpPr/>
-          <p:nvPr/>
-        </p:nvSpPr>
-        <p:spPr>
-          <a:xfrm>
-            <a:off x="3300413" y="1595438"/>
-            <a:ext cx="2538413" cy="1190625"/>
-          </a:xfrm>
-          <a:prstGeom prst="roundRect">
-            <a:avLst>
-              <a:gd name="adj" fmla="val 8000"/>
-            </a:avLst>
-          </a:prstGeom>
-          <a:solidFill>
-            <a:srgbClr val="FBF7F0"/>
-          </a:solidFill>
-          <a:ln w="9525">
-            <a:solidFill>
-              <a:srgbClr val="E2D6C4"/>
-            </a:solidFill>
-            <a:prstDash val="solid"/>
-          </a:ln>
-        </p:spPr>
-      </p:sp>
-      <p:sp>
-        <p:nvSpPr>
-          <p:cNvPr id="10" name="Shape 7"/>
-          <p:cNvSpPr/>
-          <p:nvPr/>
-        </p:nvSpPr>
-        <p:spPr>
-          <a:xfrm>
-            <a:off x="3490913" y="1785938"/>
-            <a:ext cx="323850" cy="323850"/>
-          </a:xfrm>
-          <a:prstGeom prst="ellipse">
-            <a:avLst/>
-          </a:prstGeom>
-          <a:solidFill>
-            <a:srgbClr val="B5452C"/>
-          </a:solidFill>
-          <a:ln/>
-        </p:spPr>
-      </p:sp>
-      <p:pic>
-        <p:nvPicPr>
-          <p:cNvPr id="11" name="Image 1" descr="preencoded.png">    </p:cNvPr>
-          <p:cNvPicPr>
-            <a:picLocks noChangeAspect="1"/>
-          </p:cNvPicPr>
-          <p:nvPr/>
-        </p:nvPicPr>
-        <p:blipFill>
-          <a:blip r:embed="rId2"/>
-          <a:stretch>
-            <a:fillRect/>
-          </a:stretch>
-        </p:blipFill>
-        <p:spPr>
-          <a:xfrm>
-            <a:off x="3571875" y="1866900"/>
-            <a:ext cx="161925" cy="161925"/>
-          </a:xfrm>
-          <a:prstGeom prst="rect">
-            <a:avLst/>
-          </a:prstGeom>
-        </p:spPr>
-      </p:pic>
-      <p:sp>
-        <p:nvSpPr>
-          <p:cNvPr id="12" name="Text 8"/>
-          <p:cNvSpPr txBox="1"/>
-          <p:nvPr/>
-        </p:nvSpPr>
-        <p:spPr>
-          <a:xfrm>
-            <a:off x="3910013" y="1785938"/>
-            <a:ext cx="1809750" cy="323850"/>
-          </a:xfrm>
-          <a:prstGeom prst="rect">
-            <a:avLst/>
-          </a:prstGeom>
-          <a:noFill/>
-          <a:ln/>
-        </p:spPr>
-        <p:txBody>
-          <a:bodyPr wrap="square" lIns="0" tIns="0" rIns="0" bIns="0" rtlCol="0" anchor="ctr"/>
-          <a:lstStyle/>
-          <a:p>
-            <a:pPr indent="0" marL="0">
-              <a:buNone/>
-            </a:pPr>
-            <a:r>
-              <a:rPr lang="en-US" sz="1650" b="1" dirty="0">
-                <a:solidFill>
-                  <a:srgbClr val="1B2428"/>
-                </a:solidFill>
-                <a:latin typeface="Cambria" pitchFamily="34" charset="0"/>
-                <a:ea typeface="Cambria" pitchFamily="34" charset="-122"/>
-                <a:cs typeface="Cambria" pitchFamily="34" charset="-120"/>
-              </a:rPr>
-              <a:t>Residenti</a:t>
-            </a:r>
-            <a:endParaRPr lang="en-US" sz="1650" dirty="0"/>
-          </a:p>
-        </p:txBody>
-      </p:sp>
-      <p:sp>
-        <p:nvSpPr>
-          <p:cNvPr id="13" name="Text 9"/>
-          <p:cNvSpPr txBox="1"/>
-          <p:nvPr/>
-        </p:nvSpPr>
-        <p:spPr>
-          <a:xfrm>
-            <a:off x="3490913" y="2243138"/>
-            <a:ext cx="2157413" cy="428625"/>
-          </a:xfrm>
-          <a:prstGeom prst="rect">
-            <a:avLst/>
-          </a:prstGeom>
-          <a:noFill/>
-          <a:ln/>
-        </p:spPr>
-        <p:txBody>
-          <a:bodyPr wrap="square" lIns="0" tIns="0" rIns="0" bIns="0" rtlCol="0" anchor="t"/>
-          <a:lstStyle/>
-          <a:p>
-            <a:pPr indent="0" marL="0">
-              <a:buNone/>
-            </a:pPr>
-            <a:r>
-              <a:rPr lang="en-US" sz="1050" dirty="0">
-                <a:solidFill>
-                  <a:srgbClr val="5A5F5E"/>
-                </a:solidFill>
-                <a:latin typeface="Calibri" pitchFamily="34" charset="0"/>
-                <a:ea typeface="Calibri" pitchFamily="34" charset="-122"/>
-                <a:cs typeface="Calibri" pitchFamily="34" charset="-120"/>
-              </a:rPr>
-              <a:t>Riscoprono la città e ne diventano narratori</a:t>
-            </a:r>
-            <a:endParaRPr lang="en-US" sz="1050" dirty="0"/>
-          </a:p>
-        </p:txBody>
-      </p:sp>
-      <p:sp>
-        <p:nvSpPr>
-          <p:cNvPr id="14" name="Shape 10"/>
-          <p:cNvSpPr/>
-          <p:nvPr/>
-        </p:nvSpPr>
-        <p:spPr>
-          <a:xfrm>
-            <a:off x="5991225" y="1595438"/>
-            <a:ext cx="2538413" cy="1190625"/>
-          </a:xfrm>
-          <a:prstGeom prst="roundRect">
-            <a:avLst>
-              <a:gd name="adj" fmla="val 8000"/>
-            </a:avLst>
-          </a:prstGeom>
-          <a:solidFill>
-            <a:srgbClr val="FBF7F0"/>
-          </a:solidFill>
-          <a:ln w="9525">
-            <a:solidFill>
-              <a:srgbClr val="E2D6C4"/>
-            </a:solidFill>
-            <a:prstDash val="solid"/>
-          </a:ln>
-        </p:spPr>
-      </p:sp>
-      <p:sp>
-        <p:nvSpPr>
-          <p:cNvPr id="15" name="Shape 11"/>
-          <p:cNvSpPr/>
-          <p:nvPr/>
-        </p:nvSpPr>
-        <p:spPr>
-          <a:xfrm>
-            <a:off x="6181725" y="1785938"/>
-            <a:ext cx="323850" cy="323850"/>
-          </a:xfrm>
-          <a:prstGeom prst="ellipse">
-            <a:avLst/>
-          </a:prstGeom>
-          <a:solidFill>
-            <a:srgbClr val="B5452C"/>
-          </a:solidFill>
-          <a:ln/>
-        </p:spPr>
-      </p:sp>
-      <p:pic>
-        <p:nvPicPr>
-          <p:cNvPr id="16" name="Image 2" descr="preencoded.png">    </p:cNvPr>
+          <p:cNvPr id="6" name="Image 0" descr="preencoded.png"/>
           <p:cNvPicPr>
             <a:picLocks noChangeAspect="1"/>
           </p:cNvPicPr>
@@ -3826,7 +3504,7 @@
         </p:blipFill>
         <p:spPr>
           <a:xfrm>
-            <a:off x="6262688" y="1866900"/>
+            <a:off x="881063" y="1866900"/>
             <a:ext cx="161925" cy="161925"/>
           </a:xfrm>
           <a:prstGeom prst="rect">
@@ -3836,13 +3514,13 @@
       </p:pic>
       <p:sp>
         <p:nvSpPr>
-          <p:cNvPr id="17" name="Text 12"/>
-          <p:cNvSpPr txBox="1"/>
-          <p:nvPr/>
-        </p:nvSpPr>
-        <p:spPr>
-          <a:xfrm>
-            <a:off x="6600825" y="1785938"/>
+          <p:cNvPr id="7" name="Text 4"/>
+          <p:cNvSpPr txBox="1"/>
+          <p:nvPr/>
+        </p:nvSpPr>
+        <p:spPr>
+          <a:xfrm>
+            <a:off x="1219200" y="1785938"/>
             <a:ext cx="1809750" cy="323850"/>
           </a:xfrm>
           <a:prstGeom prst="rect">
@@ -3855,7 +3533,7 @@
           <a:bodyPr wrap="square" lIns="0" tIns="0" rIns="0" bIns="0" rtlCol="0" anchor="ctr"/>
           <a:lstStyle/>
           <a:p>
-            <a:pPr indent="0" marL="0">
+            <a:pPr marL="0" indent="0">
               <a:buNone/>
             </a:pPr>
             <a:r>
@@ -3867,7 +3545,7 @@
                 <a:ea typeface="Cambria" pitchFamily="34" charset="-122"/>
                 <a:cs typeface="Cambria" pitchFamily="34" charset="-120"/>
               </a:rPr>
-              <a:t>Comune</a:t>
+              <a:t>Turisti</a:t>
             </a:r>
             <a:endParaRPr lang="en-US" sz="1650" dirty="0"/>
           </a:p>
@@ -3875,13 +3553,13 @@
       </p:sp>
       <p:sp>
         <p:nvSpPr>
-          <p:cNvPr id="18" name="Text 13"/>
-          <p:cNvSpPr txBox="1"/>
-          <p:nvPr/>
-        </p:nvSpPr>
-        <p:spPr>
-          <a:xfrm>
-            <a:off x="6181725" y="2243138"/>
+          <p:cNvPr id="8" name="Text 5"/>
+          <p:cNvSpPr txBox="1"/>
+          <p:nvPr/>
+        </p:nvSpPr>
+        <p:spPr>
+          <a:xfrm>
+            <a:off x="800100" y="2243138"/>
             <a:ext cx="2157413" cy="428625"/>
           </a:xfrm>
           <a:prstGeom prst="rect">
@@ -3894,7 +3572,7 @@
           <a:bodyPr wrap="square" lIns="0" tIns="0" rIns="0" bIns="0" rtlCol="0" anchor="t"/>
           <a:lstStyle/>
           <a:p>
-            <a:pPr indent="0" marL="0">
+            <a:pPr marL="0" indent="0">
               <a:buNone/>
             </a:pPr>
             <a:r>
@@ -3906,7 +3584,7 @@
                 <a:ea typeface="Calibri" pitchFamily="34" charset="-122"/>
                 <a:cs typeface="Calibri" pitchFamily="34" charset="-120"/>
               </a:rPr>
-              <a:t>Valorizza il patrimonio “minore” e distribuisce i flussi</a:t>
+              <a:t>Itinerari originali, oltre i soliti luoghi</a:t>
             </a:r>
             <a:endParaRPr lang="en-US" sz="1050" dirty="0"/>
           </a:p>
@@ -3914,68 +3592,68 @@
       </p:sp>
       <p:sp>
         <p:nvSpPr>
-          <p:cNvPr id="19" name="Shape 14"/>
+          <p:cNvPr id="9" name="Shape 6"/>
           <p:cNvSpPr/>
           <p:nvPr/>
         </p:nvSpPr>
         <p:spPr>
           <a:xfrm>
-            <a:off x="609600" y="2976563"/>
-            <a:ext cx="7924800" cy="1428750"/>
+            <a:off x="3300413" y="1595438"/>
+            <a:ext cx="2538413" cy="1190625"/>
           </a:xfrm>
           <a:prstGeom prst="roundRect">
             <a:avLst>
-              <a:gd name="adj" fmla="val 6667"/>
+              <a:gd name="adj" fmla="val 8000"/>
             </a:avLst>
           </a:prstGeom>
           <a:solidFill>
-            <a:srgbClr val="1B2428"/>
-          </a:solidFill>
-          <a:ln/>
-        </p:spPr>
-      </p:sp>
-      <p:sp>
-        <p:nvSpPr>
-          <p:cNvPr id="20" name="Text 15"/>
-          <p:cNvSpPr txBox="1"/>
-          <p:nvPr/>
-        </p:nvSpPr>
-        <p:spPr>
-          <a:xfrm>
-            <a:off x="838200" y="3186113"/>
-            <a:ext cx="3810000" cy="171450"/>
-          </a:xfrm>
-          <a:prstGeom prst="rect">
-            <a:avLst/>
-          </a:prstGeom>
-          <a:noFill/>
-          <a:ln/>
-        </p:spPr>
-        <p:txBody>
-          <a:bodyPr wrap="square" lIns="0" tIns="0" rIns="0" bIns="0" rtlCol="0" anchor="t"/>
-          <a:lstStyle/>
-          <a:p>
-            <a:pPr indent="0" marL="0">
-              <a:buNone/>
-            </a:pPr>
-            <a:r>
-              <a:rPr lang="en-US" sz="900" b="1" spc="150" kern="0" dirty="0">
-                <a:solidFill>
-                  <a:srgbClr val="D99A2B"/>
-                </a:solidFill>
-                <a:latin typeface="Calibri" pitchFamily="34" charset="0"/>
-                <a:ea typeface="Calibri" pitchFamily="34" charset="-122"/>
-                <a:cs typeface="Calibri" pitchFamily="34" charset="-120"/>
-              </a:rPr>
-              <a:t>NEL LUNGO PERIODO</a:t>
-            </a:r>
-            <a:endParaRPr lang="en-US" sz="900" dirty="0"/>
+            <a:srgbClr val="FBF7F0"/>
+          </a:solidFill>
+          <a:ln w="9525">
+            <a:solidFill>
+              <a:srgbClr val="E2D6C4"/>
+            </a:solidFill>
+            <a:prstDash val="solid"/>
+          </a:ln>
+        </p:spPr>
+        <p:txBody>
+          <a:bodyPr/>
+          <a:lstStyle/>
+          <a:p>
+            <a:endParaRPr lang="it-IT"/>
+          </a:p>
+        </p:txBody>
+      </p:sp>
+      <p:sp>
+        <p:nvSpPr>
+          <p:cNvPr id="10" name="Shape 7"/>
+          <p:cNvSpPr/>
+          <p:nvPr/>
+        </p:nvSpPr>
+        <p:spPr>
+          <a:xfrm>
+            <a:off x="3490913" y="1785938"/>
+            <a:ext cx="323850" cy="323850"/>
+          </a:xfrm>
+          <a:prstGeom prst="ellipse">
+            <a:avLst/>
+          </a:prstGeom>
+          <a:solidFill>
+            <a:srgbClr val="B5452C"/>
+          </a:solidFill>
+          <a:ln/>
+        </p:spPr>
+        <p:txBody>
+          <a:bodyPr/>
+          <a:lstStyle/>
+          <a:p>
+            <a:endParaRPr lang="it-IT"/>
           </a:p>
         </p:txBody>
       </p:sp>
       <p:pic>
         <p:nvPicPr>
-          <p:cNvPr id="21" name="Image 3" descr="preencoded.png">    </p:cNvPr>
+          <p:cNvPr id="11" name="Image 1" descr="preencoded.png"/>
           <p:cNvPicPr>
             <a:picLocks noChangeAspect="1"/>
           </p:cNvPicPr>
@@ -3989,8 +3667,8 @@
         </p:blipFill>
         <p:spPr>
           <a:xfrm>
-            <a:off x="838200" y="3609975"/>
-            <a:ext cx="247650" cy="247650"/>
+            <a:off x="3571875" y="1866900"/>
+            <a:ext cx="161925" cy="161925"/>
           </a:xfrm>
           <a:prstGeom prst="rect">
             <a:avLst/>
@@ -3999,14 +3677,53 @@
       </p:pic>
       <p:sp>
         <p:nvSpPr>
-          <p:cNvPr id="22" name="Text 16"/>
-          <p:cNvSpPr txBox="1"/>
-          <p:nvPr/>
-        </p:nvSpPr>
-        <p:spPr>
-          <a:xfrm>
-            <a:off x="1200150" y="3571875"/>
-            <a:ext cx="2000250" cy="571500"/>
+          <p:cNvPr id="12" name="Text 8"/>
+          <p:cNvSpPr txBox="1"/>
+          <p:nvPr/>
+        </p:nvSpPr>
+        <p:spPr>
+          <a:xfrm>
+            <a:off x="3910013" y="1785938"/>
+            <a:ext cx="1809750" cy="323850"/>
+          </a:xfrm>
+          <a:prstGeom prst="rect">
+            <a:avLst/>
+          </a:prstGeom>
+          <a:noFill/>
+          <a:ln/>
+        </p:spPr>
+        <p:txBody>
+          <a:bodyPr wrap="square" lIns="0" tIns="0" rIns="0" bIns="0" rtlCol="0" anchor="ctr"/>
+          <a:lstStyle/>
+          <a:p>
+            <a:pPr marL="0" indent="0">
+              <a:buNone/>
+            </a:pPr>
+            <a:r>
+              <a:rPr lang="en-US" sz="1650" b="1" dirty="0">
+                <a:solidFill>
+                  <a:srgbClr val="1B2428"/>
+                </a:solidFill>
+                <a:latin typeface="Cambria" pitchFamily="34" charset="0"/>
+                <a:ea typeface="Cambria" pitchFamily="34" charset="-122"/>
+                <a:cs typeface="Cambria" pitchFamily="34" charset="-120"/>
+              </a:rPr>
+              <a:t>Residenti</a:t>
+            </a:r>
+            <a:endParaRPr lang="en-US" sz="1650" dirty="0"/>
+          </a:p>
+        </p:txBody>
+      </p:sp>
+      <p:sp>
+        <p:nvSpPr>
+          <p:cNvPr id="13" name="Text 9"/>
+          <p:cNvSpPr txBox="1"/>
+          <p:nvPr/>
+        </p:nvSpPr>
+        <p:spPr>
+          <a:xfrm>
+            <a:off x="3490913" y="2243138"/>
+            <a:ext cx="2157413" cy="428625"/>
           </a:xfrm>
           <a:prstGeom prst="rect">
             <a:avLst/>
@@ -4018,27 +3735,88 @@
           <a:bodyPr wrap="square" lIns="0" tIns="0" rIns="0" bIns="0" rtlCol="0" anchor="t"/>
           <a:lstStyle/>
           <a:p>
-            <a:pPr indent="0" marL="0">
+            <a:pPr marL="0" indent="0">
               <a:buNone/>
             </a:pPr>
             <a:r>
               <a:rPr lang="en-US" sz="1050" dirty="0">
                 <a:solidFill>
-                  <a:srgbClr val="F4EEE4"/>
+                  <a:srgbClr val="5A5F5E"/>
                 </a:solidFill>
                 <a:latin typeface="Calibri" pitchFamily="34" charset="0"/>
                 <a:ea typeface="Calibri" pitchFamily="34" charset="-122"/>
                 <a:cs typeface="Calibri" pitchFamily="34" charset="-120"/>
               </a:rPr>
-              <a:t>Un archivio collettivo della memoria cittadina</a:t>
+              <a:t>Riscoprono la città e ne diventano narratori</a:t>
             </a:r>
             <a:endParaRPr lang="en-US" sz="1050" dirty="0"/>
+          </a:p>
+        </p:txBody>
+      </p:sp>
+      <p:sp>
+        <p:nvSpPr>
+          <p:cNvPr id="14" name="Shape 10"/>
+          <p:cNvSpPr/>
+          <p:nvPr/>
+        </p:nvSpPr>
+        <p:spPr>
+          <a:xfrm>
+            <a:off x="5991225" y="1595438"/>
+            <a:ext cx="2538413" cy="1190625"/>
+          </a:xfrm>
+          <a:prstGeom prst="roundRect">
+            <a:avLst>
+              <a:gd name="adj" fmla="val 8000"/>
+            </a:avLst>
+          </a:prstGeom>
+          <a:solidFill>
+            <a:srgbClr val="FBF7F0"/>
+          </a:solidFill>
+          <a:ln w="9525">
+            <a:solidFill>
+              <a:srgbClr val="E2D6C4"/>
+            </a:solidFill>
+            <a:prstDash val="solid"/>
+          </a:ln>
+        </p:spPr>
+        <p:txBody>
+          <a:bodyPr/>
+          <a:lstStyle/>
+          <a:p>
+            <a:endParaRPr lang="it-IT"/>
+          </a:p>
+        </p:txBody>
+      </p:sp>
+      <p:sp>
+        <p:nvSpPr>
+          <p:cNvPr id="15" name="Shape 11"/>
+          <p:cNvSpPr/>
+          <p:nvPr/>
+        </p:nvSpPr>
+        <p:spPr>
+          <a:xfrm>
+            <a:off x="6181725" y="1785938"/>
+            <a:ext cx="323850" cy="323850"/>
+          </a:xfrm>
+          <a:prstGeom prst="ellipse">
+            <a:avLst/>
+          </a:prstGeom>
+          <a:solidFill>
+            <a:srgbClr val="B5452C"/>
+          </a:solidFill>
+          <a:ln/>
+        </p:spPr>
+        <p:txBody>
+          <a:bodyPr/>
+          <a:lstStyle/>
+          <a:p>
+            <a:endParaRPr lang="it-IT"/>
           </a:p>
         </p:txBody>
       </p:sp>
       <p:pic>
         <p:nvPicPr>
-          <p:cNvPr id="23" name="Image 4" descr="preencoded.png">    </p:cNvPr>
+          <p:cNvPr id="16" name="Image 2" descr="preencoded.png"/>
           <p:cNvPicPr>
             <a:picLocks noChangeAspect="1"/>
           </p:cNvPicPr>
@@ -4052,8 +3830,8 @@
         </p:blipFill>
         <p:spPr>
           <a:xfrm>
-            <a:off x="3386138" y="3609975"/>
-            <a:ext cx="247650" cy="247650"/>
+            <a:off x="6262688" y="1866900"/>
+            <a:ext cx="161925" cy="161925"/>
           </a:xfrm>
           <a:prstGeom prst="rect">
             <a:avLst/>
@@ -4062,14 +3840,53 @@
       </p:pic>
       <p:sp>
         <p:nvSpPr>
-          <p:cNvPr id="24" name="Text 17"/>
-          <p:cNvSpPr txBox="1"/>
-          <p:nvPr/>
-        </p:nvSpPr>
-        <p:spPr>
-          <a:xfrm>
-            <a:off x="3748087" y="3571875"/>
-            <a:ext cx="2000250" cy="571500"/>
+          <p:cNvPr id="17" name="Text 12"/>
+          <p:cNvSpPr txBox="1"/>
+          <p:nvPr/>
+        </p:nvSpPr>
+        <p:spPr>
+          <a:xfrm>
+            <a:off x="6600825" y="1785938"/>
+            <a:ext cx="1809750" cy="323850"/>
+          </a:xfrm>
+          <a:prstGeom prst="rect">
+            <a:avLst/>
+          </a:prstGeom>
+          <a:noFill/>
+          <a:ln/>
+        </p:spPr>
+        <p:txBody>
+          <a:bodyPr wrap="square" lIns="0" tIns="0" rIns="0" bIns="0" rtlCol="0" anchor="ctr"/>
+          <a:lstStyle/>
+          <a:p>
+            <a:pPr marL="0" indent="0">
+              <a:buNone/>
+            </a:pPr>
+            <a:r>
+              <a:rPr lang="en-US" sz="1650" b="1" dirty="0">
+                <a:solidFill>
+                  <a:srgbClr val="1B2428"/>
+                </a:solidFill>
+                <a:latin typeface="Cambria" pitchFamily="34" charset="0"/>
+                <a:ea typeface="Cambria" pitchFamily="34" charset="-122"/>
+                <a:cs typeface="Cambria" pitchFamily="34" charset="-120"/>
+              </a:rPr>
+              <a:t>Comune</a:t>
+            </a:r>
+            <a:endParaRPr lang="en-US" sz="1650" dirty="0"/>
+          </a:p>
+        </p:txBody>
+      </p:sp>
+      <p:sp>
+        <p:nvSpPr>
+          <p:cNvPr id="18" name="Text 13"/>
+          <p:cNvSpPr txBox="1"/>
+          <p:nvPr/>
+        </p:nvSpPr>
+        <p:spPr>
+          <a:xfrm>
+            <a:off x="6181725" y="2243138"/>
+            <a:ext cx="2157413" cy="428625"/>
           </a:xfrm>
           <a:prstGeom prst="rect">
             <a:avLst/>
@@ -4081,27 +3898,95 @@
           <a:bodyPr wrap="square" lIns="0" tIns="0" rIns="0" bIns="0" rtlCol="0" anchor="t"/>
           <a:lstStyle/>
           <a:p>
-            <a:pPr indent="0" marL="0">
+            <a:pPr marL="0" indent="0">
               <a:buNone/>
             </a:pPr>
             <a:r>
               <a:rPr lang="en-US" sz="1050" dirty="0">
                 <a:solidFill>
-                  <a:srgbClr val="F4EEE4"/>
+                  <a:srgbClr val="5A5F5E"/>
                 </a:solidFill>
                 <a:latin typeface="Calibri" pitchFamily="34" charset="0"/>
                 <a:ea typeface="Calibri" pitchFamily="34" charset="-122"/>
                 <a:cs typeface="Calibri" pitchFamily="34" charset="-120"/>
               </a:rPr>
-              <a:t>Un motivo per restare oltre i 2,7 giorni</a:t>
+              <a:t>Valorizza il patrimonio “minore” e distribuisce i flussi</a:t>
             </a:r>
             <a:endParaRPr lang="en-US" sz="1050" dirty="0"/>
+          </a:p>
+        </p:txBody>
+      </p:sp>
+      <p:sp>
+        <p:nvSpPr>
+          <p:cNvPr id="19" name="Shape 14"/>
+          <p:cNvSpPr/>
+          <p:nvPr/>
+        </p:nvSpPr>
+        <p:spPr>
+          <a:xfrm>
+            <a:off x="609600" y="2976563"/>
+            <a:ext cx="7924800" cy="1428750"/>
+          </a:xfrm>
+          <a:prstGeom prst="roundRect">
+            <a:avLst>
+              <a:gd name="adj" fmla="val 6667"/>
+            </a:avLst>
+          </a:prstGeom>
+          <a:solidFill>
+            <a:srgbClr val="1B2428"/>
+          </a:solidFill>
+          <a:ln/>
+        </p:spPr>
+        <p:txBody>
+          <a:bodyPr/>
+          <a:lstStyle/>
+          <a:p>
+            <a:endParaRPr lang="it-IT"/>
+          </a:p>
+        </p:txBody>
+      </p:sp>
+      <p:sp>
+        <p:nvSpPr>
+          <p:cNvPr id="20" name="Text 15"/>
+          <p:cNvSpPr txBox="1"/>
+          <p:nvPr/>
+        </p:nvSpPr>
+        <p:spPr>
+          <a:xfrm>
+            <a:off x="838200" y="3186113"/>
+            <a:ext cx="3810000" cy="171450"/>
+          </a:xfrm>
+          <a:prstGeom prst="rect">
+            <a:avLst/>
+          </a:prstGeom>
+          <a:noFill/>
+          <a:ln/>
+        </p:spPr>
+        <p:txBody>
+          <a:bodyPr wrap="square" lIns="0" tIns="0" rIns="0" bIns="0" rtlCol="0" anchor="t"/>
+          <a:lstStyle/>
+          <a:p>
+            <a:pPr marL="0" indent="0">
+              <a:buNone/>
+            </a:pPr>
+            <a:r>
+              <a:rPr lang="en-US" sz="900" b="1" kern="0" spc="150" dirty="0">
+                <a:solidFill>
+                  <a:srgbClr val="D99A2B"/>
+                </a:solidFill>
+                <a:latin typeface="Calibri" pitchFamily="34" charset="0"/>
+                <a:ea typeface="Calibri" pitchFamily="34" charset="-122"/>
+                <a:cs typeface="Calibri" pitchFamily="34" charset="-120"/>
+              </a:rPr>
+              <a:t>NEL LUNGO PERIODO</a:t>
+            </a:r>
+            <a:endParaRPr lang="en-US" sz="900" dirty="0"/>
           </a:p>
         </p:txBody>
       </p:sp>
       <p:pic>
         <p:nvPicPr>
-          <p:cNvPr id="25" name="Image 5" descr="preencoded.png">    </p:cNvPr>
+          <p:cNvPr id="21" name="Image 3" descr="preencoded.png"/>
           <p:cNvPicPr>
             <a:picLocks noChangeAspect="1"/>
           </p:cNvPicPr>
@@ -4115,6 +4000,132 @@
         </p:blipFill>
         <p:spPr>
           <a:xfrm>
+            <a:off x="838200" y="3609975"/>
+            <a:ext cx="247650" cy="247650"/>
+          </a:xfrm>
+          <a:prstGeom prst="rect">
+            <a:avLst/>
+          </a:prstGeom>
+        </p:spPr>
+      </p:pic>
+      <p:sp>
+        <p:nvSpPr>
+          <p:cNvPr id="22" name="Text 16"/>
+          <p:cNvSpPr txBox="1"/>
+          <p:nvPr/>
+        </p:nvSpPr>
+        <p:spPr>
+          <a:xfrm>
+            <a:off x="1200150" y="3571875"/>
+            <a:ext cx="2000250" cy="571500"/>
+          </a:xfrm>
+          <a:prstGeom prst="rect">
+            <a:avLst/>
+          </a:prstGeom>
+          <a:noFill/>
+          <a:ln/>
+        </p:spPr>
+        <p:txBody>
+          <a:bodyPr wrap="square" lIns="0" tIns="0" rIns="0" bIns="0" rtlCol="0" anchor="t"/>
+          <a:lstStyle/>
+          <a:p>
+            <a:pPr marL="0" indent="0">
+              <a:buNone/>
+            </a:pPr>
+            <a:r>
+              <a:rPr lang="en-US" sz="1050" dirty="0">
+                <a:solidFill>
+                  <a:srgbClr val="F4EEE4"/>
+                </a:solidFill>
+                <a:latin typeface="Calibri" pitchFamily="34" charset="0"/>
+                <a:ea typeface="Calibri" pitchFamily="34" charset="-122"/>
+                <a:cs typeface="Calibri" pitchFamily="34" charset="-120"/>
+              </a:rPr>
+              <a:t>Un archivio collettivo della memoria cittadina</a:t>
+            </a:r>
+            <a:endParaRPr lang="en-US" sz="1050" dirty="0"/>
+          </a:p>
+        </p:txBody>
+      </p:sp>
+      <p:pic>
+        <p:nvPicPr>
+          <p:cNvPr id="23" name="Image 4" descr="preencoded.png"/>
+          <p:cNvPicPr>
+            <a:picLocks noChangeAspect="1"/>
+          </p:cNvPicPr>
+          <p:nvPr/>
+        </p:nvPicPr>
+        <p:blipFill>
+          <a:blip r:embed="rId7"/>
+          <a:stretch>
+            <a:fillRect/>
+          </a:stretch>
+        </p:blipFill>
+        <p:spPr>
+          <a:xfrm>
+            <a:off x="3386138" y="3609975"/>
+            <a:ext cx="247650" cy="247650"/>
+          </a:xfrm>
+          <a:prstGeom prst="rect">
+            <a:avLst/>
+          </a:prstGeom>
+        </p:spPr>
+      </p:pic>
+      <p:sp>
+        <p:nvSpPr>
+          <p:cNvPr id="24" name="Text 17"/>
+          <p:cNvSpPr txBox="1"/>
+          <p:nvPr/>
+        </p:nvSpPr>
+        <p:spPr>
+          <a:xfrm>
+            <a:off x="3748087" y="3571875"/>
+            <a:ext cx="2000250" cy="571500"/>
+          </a:xfrm>
+          <a:prstGeom prst="rect">
+            <a:avLst/>
+          </a:prstGeom>
+          <a:noFill/>
+          <a:ln/>
+        </p:spPr>
+        <p:txBody>
+          <a:bodyPr wrap="square" lIns="0" tIns="0" rIns="0" bIns="0" rtlCol="0" anchor="t"/>
+          <a:lstStyle/>
+          <a:p>
+            <a:pPr marL="0" indent="0">
+              <a:buNone/>
+            </a:pPr>
+            <a:r>
+              <a:rPr lang="en-US" sz="1050" dirty="0">
+                <a:solidFill>
+                  <a:srgbClr val="F4EEE4"/>
+                </a:solidFill>
+                <a:latin typeface="Calibri" pitchFamily="34" charset="0"/>
+                <a:ea typeface="Calibri" pitchFamily="34" charset="-122"/>
+                <a:cs typeface="Calibri" pitchFamily="34" charset="-120"/>
+              </a:rPr>
+              <a:t>Un motivo per restare oltre i 2,7 giorni</a:t>
+            </a:r>
+            <a:endParaRPr lang="en-US" sz="1050" dirty="0"/>
+          </a:p>
+        </p:txBody>
+      </p:sp>
+      <p:pic>
+        <p:nvPicPr>
+          <p:cNvPr id="25" name="Image 5" descr="preencoded.png"/>
+          <p:cNvPicPr>
+            <a:picLocks noChangeAspect="1"/>
+          </p:cNvPicPr>
+          <p:nvPr/>
+        </p:nvPicPr>
+        <p:blipFill>
+          <a:blip r:embed="rId8"/>
+          <a:stretch>
+            <a:fillRect/>
+          </a:stretch>
+        </p:blipFill>
+        <p:spPr>
+          <a:xfrm>
             <a:off x="5934075" y="3609975"/>
             <a:ext cx="247650" cy="247650"/>
           </a:xfrm>
@@ -4144,7 +4155,7 @@
           <a:bodyPr wrap="square" lIns="0" tIns="0" rIns="0" bIns="0" rtlCol="0" anchor="t"/>
           <a:lstStyle/>
           <a:p>
-            <a:pPr indent="0" marL="0">
+            <a:pPr marL="0" indent="0">
               <a:buNone/>
             </a:pPr>
             <a:r>
@@ -4178,6 +4189,7 @@
         <a:solidFill>
           <a:srgbClr val="1B2428"/>
         </a:solidFill>
+        <a:effectLst/>
       </p:bgPr>
     </p:bg>
     <p:spTree>
@@ -4213,6 +4225,13 @@
           </a:solidFill>
           <a:ln/>
         </p:spPr>
+        <p:txBody>
+          <a:bodyPr/>
+          <a:lstStyle/>
+          <a:p>
+            <a:endParaRPr lang="it-IT"/>
+          </a:p>
+        </p:txBody>
       </p:sp>
       <p:sp>
         <p:nvSpPr>
@@ -4233,6 +4252,13 @@
           </a:solidFill>
           <a:ln/>
         </p:spPr>
+        <p:txBody>
+          <a:bodyPr/>
+          <a:lstStyle/>
+          <a:p>
+            <a:endParaRPr lang="it-IT"/>
+          </a:p>
+        </p:txBody>
       </p:sp>
       <p:sp>
         <p:nvSpPr>
@@ -4255,7 +4281,7 @@
           <a:bodyPr wrap="square" lIns="0" tIns="0" rIns="0" bIns="0" rtlCol="0" anchor="t"/>
           <a:lstStyle/>
           <a:p>
-            <a:pPr algn="ctr" indent="0" marL="0">
+            <a:pPr marL="0" indent="0" algn="ctr">
               <a:buNone/>
             </a:pPr>
             <a:r>
@@ -4294,7 +4320,7 @@
           <a:bodyPr wrap="square" lIns="0" tIns="0" rIns="0" bIns="0" rtlCol="0" anchor="t"/>
           <a:lstStyle/>
           <a:p>
-            <a:pPr algn="ctr" indent="0" marL="0">
+            <a:pPr marL="0" indent="0" algn="ctr">
               <a:buNone/>
             </a:pPr>
             <a:r>
@@ -4304,9 +4330,8 @@
                 </a:solidFill>
                 <a:latin typeface="Cambria" pitchFamily="34" charset="0"/>
                 <a:ea typeface="Cambria" pitchFamily="34" charset="-122"/>
-                <a:cs typeface="Cambria" pitchFamily="34" charset="-120"/>
-              </a:rPr>
-              <a:t>Domande?</a:t>
+              </a:rPr>
+              <a:t>- Q&amp;A</a:t>
             </a:r>
             <a:endParaRPr lang="en-US" sz="2100" dirty="0"/>
           </a:p>
@@ -4333,7 +4358,7 @@
           <a:bodyPr wrap="square" lIns="0" tIns="0" rIns="0" bIns="0" rtlCol="0" anchor="t"/>
           <a:lstStyle/>
           <a:p>
-            <a:pPr algn="ctr" indent="0" marL="0">
+            <a:pPr marL="0" indent="0" algn="ctr">
               <a:buNone/>
             </a:pPr>
             <a:r>
@@ -4652,4 +4677,319 @@
     </a:ext>
   </a:extLst>
 </a:theme>
+</file>
+
+<file path=ppt/theme/theme2.xml><?xml version="1.0" encoding="utf-8"?>
+<a:theme xmlns:a="http://schemas.openxmlformats.org/drawingml/2006/main" name="Tema di Office">
+  <a:themeElements>
+    <a:clrScheme name="Office">
+      <a:dk1>
+        <a:sysClr val="windowText" lastClr="000000"/>
+      </a:dk1>
+      <a:lt1>
+        <a:sysClr val="window" lastClr="FFFFFF"/>
+      </a:lt1>
+      <a:dk2>
+        <a:srgbClr val="0E2841"/>
+      </a:dk2>
+      <a:lt2>
+        <a:srgbClr val="E8E8E8"/>
+      </a:lt2>
+      <a:accent1>
+        <a:srgbClr val="156082"/>
+      </a:accent1>
+      <a:accent2>
+        <a:srgbClr val="E97132"/>
+      </a:accent2>
+      <a:accent3>
+        <a:srgbClr val="196B24"/>
+      </a:accent3>
+      <a:accent4>
+        <a:srgbClr val="0F9ED5"/>
+      </a:accent4>
+      <a:accent5>
+        <a:srgbClr val="A02B93"/>
+      </a:accent5>
+      <a:accent6>
+        <a:srgbClr val="4EA72E"/>
+      </a:accent6>
+      <a:hlink>
+        <a:srgbClr val="467886"/>
+      </a:hlink>
+      <a:folHlink>
+        <a:srgbClr val="96607D"/>
+      </a:folHlink>
+    </a:clrScheme>
+    <a:fontScheme name="Office">
+      <a:majorFont>
+        <a:latin typeface="Aptos Display" panose="02110004020202020204"/>
+        <a:ea typeface=""/>
+        <a:cs typeface=""/>
+        <a:font script="Jpan" typeface="游ゴシック Light"/>
+        <a:font script="Hang" typeface="맑은 고딕"/>
+        <a:font script="Hans" typeface="等线 Light"/>
+        <a:font script="Hant" typeface="新細明體"/>
+        <a:font script="Arab" typeface="Times New Roman"/>
+        <a:font script="Hebr" typeface="Times New Roman"/>
+        <a:font script="Thai" typeface="Angsana New"/>
+        <a:font script="Ethi" typeface="Nyala"/>
+        <a:font script="Beng" typeface="Vrinda"/>
+        <a:font script="Gujr" typeface="Shruti"/>
+        <a:font script="Khmr" typeface="MoolBoran"/>
+        <a:font script="Knda" typeface="Tunga"/>
+        <a:font script="Guru" typeface="Raavi"/>
+        <a:font script="Cans" typeface="Euphemia"/>
+        <a:font script="Cher" typeface="Plantagenet Cherokee"/>
+        <a:font script="Yiii" typeface="Microsoft Yi Baiti"/>
+        <a:font script="Tibt" typeface="Microsoft Himalaya"/>
+        <a:font script="Thaa" typeface="MV Boli"/>
+        <a:font script="Deva" typeface="Mangal"/>
+        <a:font script="Telu" typeface="Gautami"/>
+        <a:font script="Taml" typeface="Latha"/>
+        <a:font script="Syrc" typeface="Estrangelo Edessa"/>
+        <a:font script="Orya" typeface="Kalinga"/>
+        <a:font script="Mlym" typeface="Kartika"/>
+        <a:font script="Laoo" typeface="DokChampa"/>
+        <a:font script="Sinh" typeface="Iskoola Pota"/>
+        <a:font script="Mong" typeface="Mongolian Baiti"/>
+        <a:font script="Viet" typeface="Times New Roman"/>
+        <a:font script="Uigh" typeface="Microsoft Uighur"/>
+        <a:font script="Geor" typeface="Sylfaen"/>
+        <a:font script="Armn" typeface="Arial"/>
+        <a:font script="Bugi" typeface="Leelawadee UI"/>
+        <a:font script="Bopo" typeface="Microsoft JhengHei"/>
+        <a:font script="Java" typeface="Javanese Text"/>
+        <a:font script="Lisu" typeface="Segoe UI"/>
+        <a:font script="Mymr" typeface="Myanmar Text"/>
+        <a:font script="Nkoo" typeface="Ebrima"/>
+        <a:font script="Olck" typeface="Nirmala UI"/>
+        <a:font script="Osma" typeface="Ebrima"/>
+        <a:font script="Phag" typeface="Phagspa"/>
+        <a:font script="Syrn" typeface="Estrangelo Edessa"/>
+        <a:font script="Syrj" typeface="Estrangelo Edessa"/>
+        <a:font script="Syre" typeface="Estrangelo Edessa"/>
+        <a:font script="Sora" typeface="Nirmala UI"/>
+        <a:font script="Tale" typeface="Microsoft Tai Le"/>
+        <a:font script="Talu" typeface="Microsoft New Tai Lue"/>
+        <a:font script="Tfng" typeface="Ebrima"/>
+      </a:majorFont>
+      <a:minorFont>
+        <a:latin typeface="Aptos" panose="02110004020202020204"/>
+        <a:ea typeface=""/>
+        <a:cs typeface=""/>
+        <a:font script="Jpan" typeface="游ゴシック"/>
+        <a:font script="Hang" typeface="맑은 고딕"/>
+        <a:font script="Hans" typeface="等线"/>
+        <a:font script="Hant" typeface="新細明體"/>
+        <a:font script="Arab" typeface="Arial"/>
+        <a:font script="Hebr" typeface="Arial"/>
+        <a:font script="Thai" typeface="Cordia New"/>
+        <a:font script="Ethi" typeface="Nyala"/>
+        <a:font script="Beng" typeface="Vrinda"/>
+        <a:font script="Gujr" typeface="Shruti"/>
+        <a:font script="Khmr" typeface="DaunPenh"/>
+        <a:font script="Knda" typeface="Tunga"/>
+        <a:font script="Guru" typeface="Raavi"/>
+        <a:font script="Cans" typeface="Euphemia"/>
+        <a:font script="Cher" typeface="Plantagenet Cherokee"/>
+        <a:font script="Yiii" typeface="Microsoft Yi Baiti"/>
+        <a:font script="Tibt" typeface="Microsoft Himalaya"/>
+        <a:font script="Thaa" typeface="MV Boli"/>
+        <a:font script="Deva" typeface="Mangal"/>
+        <a:font script="Telu" typeface="Gautami"/>
+        <a:font script="Taml" typeface="Latha"/>
+        <a:font script="Syrc" typeface="Estrangelo Edessa"/>
+        <a:font script="Orya" typeface="Kalinga"/>
+        <a:font script="Mlym" typeface="Kartika"/>
+        <a:font script="Laoo" typeface="DokChampa"/>
+        <a:font script="Sinh" typeface="Iskoola Pota"/>
+        <a:font script="Mong" typeface="Mongolian Baiti"/>
+        <a:font script="Viet" typeface="Arial"/>
+        <a:font script="Uigh" typeface="Microsoft Uighur"/>
+        <a:font script="Geor" typeface="Sylfaen"/>
+        <a:font script="Armn" typeface="Arial"/>
+        <a:font script="Bugi" typeface="Leelawadee UI"/>
+        <a:font script="Bopo" typeface="Microsoft JhengHei"/>
+        <a:font script="Java" typeface="Javanese Text"/>
+        <a:font script="Lisu" typeface="Segoe UI"/>
+        <a:font script="Mymr" typeface="Myanmar Text"/>
+        <a:font script="Nkoo" typeface="Ebrima"/>
+        <a:font script="Olck" typeface="Nirmala UI"/>
+        <a:font script="Osma" typeface="Ebrima"/>
+        <a:font script="Phag" typeface="Phagspa"/>
+        <a:font script="Syrn" typeface="Estrangelo Edessa"/>
+        <a:font script="Syrj" typeface="Estrangelo Edessa"/>
+        <a:font script="Syre" typeface="Estrangelo Edessa"/>
+        <a:font script="Sora" typeface="Nirmala UI"/>
+        <a:font script="Tale" typeface="Microsoft Tai Le"/>
+        <a:font script="Talu" typeface="Microsoft New Tai Lue"/>
+        <a:font script="Tfng" typeface="Ebrima"/>
+      </a:minorFont>
+    </a:fontScheme>
+    <a:fmtScheme name="Office">
+      <a:fillStyleLst>
+        <a:solidFill>
+          <a:schemeClr val="phClr"/>
+        </a:solidFill>
+        <a:gradFill rotWithShape="1">
+          <a:gsLst>
+            <a:gs pos="0">
+              <a:schemeClr val="phClr">
+                <a:lumMod val="110000"/>
+                <a:satMod val="105000"/>
+                <a:tint val="67000"/>
+              </a:schemeClr>
+            </a:gs>
+            <a:gs pos="50000">
+              <a:schemeClr val="phClr">
+                <a:lumMod val="105000"/>
+                <a:satMod val="103000"/>
+                <a:tint val="73000"/>
+              </a:schemeClr>
+            </a:gs>
+            <a:gs pos="100000">
+              <a:schemeClr val="phClr">
+                <a:lumMod val="105000"/>
+                <a:satMod val="109000"/>
+                <a:tint val="81000"/>
+              </a:schemeClr>
+            </a:gs>
+          </a:gsLst>
+          <a:lin ang="5400000" scaled="0"/>
+        </a:gradFill>
+        <a:gradFill rotWithShape="1">
+          <a:gsLst>
+            <a:gs pos="0">
+              <a:schemeClr val="phClr">
+                <a:satMod val="103000"/>
+                <a:lumMod val="102000"/>
+                <a:tint val="94000"/>
+              </a:schemeClr>
+            </a:gs>
+            <a:gs pos="50000">
+              <a:schemeClr val="phClr">
+                <a:satMod val="110000"/>
+                <a:lumMod val="100000"/>
+                <a:shade val="100000"/>
+              </a:schemeClr>
+            </a:gs>
+            <a:gs pos="100000">
+              <a:schemeClr val="phClr">
+                <a:lumMod val="99000"/>
+                <a:satMod val="120000"/>
+                <a:shade val="78000"/>
+              </a:schemeClr>
+            </a:gs>
+          </a:gsLst>
+          <a:lin ang="5400000" scaled="0"/>
+        </a:gradFill>
+      </a:fillStyleLst>
+      <a:lnStyleLst>
+        <a:ln w="12700" cap="flat" cmpd="sng" algn="ctr">
+          <a:solidFill>
+            <a:schemeClr val="phClr"/>
+          </a:solidFill>
+          <a:prstDash val="solid"/>
+          <a:miter lim="800000"/>
+        </a:ln>
+        <a:ln w="19050" cap="flat" cmpd="sng" algn="ctr">
+          <a:solidFill>
+            <a:schemeClr val="phClr"/>
+          </a:solidFill>
+          <a:prstDash val="solid"/>
+          <a:miter lim="800000"/>
+        </a:ln>
+        <a:ln w="25400" cap="flat" cmpd="sng" algn="ctr">
+          <a:solidFill>
+            <a:schemeClr val="phClr"/>
+          </a:solidFill>
+          <a:prstDash val="solid"/>
+          <a:miter lim="800000"/>
+        </a:ln>
+      </a:lnStyleLst>
+      <a:effectStyleLst>
+        <a:effectStyle>
+          <a:effectLst/>
+        </a:effectStyle>
+        <a:effectStyle>
+          <a:effectLst/>
+        </a:effectStyle>
+        <a:effectStyle>
+          <a:effectLst>
+            <a:outerShdw blurRad="57150" dist="19050" dir="5400000" algn="ctr" rotWithShape="0">
+              <a:srgbClr val="000000">
+                <a:alpha val="63000"/>
+              </a:srgbClr>
+            </a:outerShdw>
+          </a:effectLst>
+        </a:effectStyle>
+      </a:effectStyleLst>
+      <a:bgFillStyleLst>
+        <a:solidFill>
+          <a:schemeClr val="phClr"/>
+        </a:solidFill>
+        <a:solidFill>
+          <a:schemeClr val="phClr">
+            <a:tint val="95000"/>
+            <a:satMod val="170000"/>
+          </a:schemeClr>
+        </a:solidFill>
+        <a:gradFill rotWithShape="1">
+          <a:gsLst>
+            <a:gs pos="0">
+              <a:schemeClr val="phClr">
+                <a:tint val="93000"/>
+                <a:satMod val="150000"/>
+                <a:shade val="98000"/>
+                <a:lumMod val="102000"/>
+              </a:schemeClr>
+            </a:gs>
+            <a:gs pos="50000">
+              <a:schemeClr val="phClr">
+                <a:tint val="98000"/>
+                <a:satMod val="130000"/>
+                <a:shade val="90000"/>
+                <a:lumMod val="103000"/>
+              </a:schemeClr>
+            </a:gs>
+            <a:gs pos="100000">
+              <a:schemeClr val="phClr">
+                <a:shade val="63000"/>
+                <a:satMod val="120000"/>
+              </a:schemeClr>
+            </a:gs>
+          </a:gsLst>
+          <a:lin ang="5400000" scaled="0"/>
+        </a:gradFill>
+      </a:bgFillStyleLst>
+    </a:fmtScheme>
+  </a:themeElements>
+  <a:objectDefaults>
+    <a:lnDef>
+      <a:spPr/>
+      <a:bodyPr/>
+      <a:lstStyle/>
+      <a:style>
+        <a:lnRef idx="2">
+          <a:schemeClr val="accent1"/>
+        </a:lnRef>
+        <a:fillRef idx="0">
+          <a:schemeClr val="accent1"/>
+        </a:fillRef>
+        <a:effectRef idx="1">
+          <a:schemeClr val="accent1"/>
+        </a:effectRef>
+        <a:fontRef idx="minor">
+          <a:schemeClr val="tx1"/>
+        </a:fontRef>
+      </a:style>
+    </a:lnDef>
+  </a:objectDefaults>
+  <a:extraClrSchemeLst/>
+  <a:extLst>
+    <a:ext uri="{05A4C25C-085E-4340-85A3-A5531E510DB2}">
+      <thm15:themeFamily xmlns:thm15="http://schemas.microsoft.com/office/thememl/2012/main" name="Office Theme" id="{2E142A2C-CD16-42D6-873A-C26D2A0506FA}" vid="{1BDDFF52-6CD6-40A5-AB3C-68EB2F1E4D0A}"/>
+    </a:ext>
+  </a:extLst>
+</a:theme>
 </file>